--- a/docx/final/工业轴承设备剩余寿命预测系统的实现-结题答辩.pptx
+++ b/docx/final/工业轴承设备剩余寿命预测系统的实现-结题答辩.pptx
@@ -6486,7 +6486,7 @@
                 </a:solidFill>
                 <a:latin typeface="PingFang SC"/>
               </a:rPr>
-              <a:t>为什么不是分类？</a:t>
+              <a:t>任务边界？</a:t>
             </a:r>
           </a:p>
         </p:txBody>
@@ -8288,7 +8288,7 @@
               </a:defRPr>
             </a:pPr>
             <a:r>
-              <a:t>项目不是做故障类型分类，而是面向预测性维护的轴承剩余寿命预测系统。</a:t>
+              <a:t>项目定位为面向预测性维护的轴承剩余寿命预测系统。</a:t>
             </a:r>
           </a:p>
           <a:p>
@@ -11301,7 +11301,7 @@
               </a:defRPr>
             </a:pPr>
             <a:r>
-              <a:t>峭度、脉冲因子对冲击性故障更敏感，适合捕捉早期异常波动。</a:t>
+              <a:t>峭度、脉冲因子对冲击性退化或失效更敏感，适合捕捉早期异常波动。</a:t>
             </a:r>
           </a:p>
           <a:p>

--- a/docx/final/工业轴承设备剩余寿命预测系统的实现-结题答辩.pptx
+++ b/docx/final/工业轴承设备剩余寿命预测系统的实现-结题答辩.pptx
@@ -3283,7 +3283,7 @@
                 </a:solidFill>
                 <a:latin typeface="PingFang SC"/>
               </a:rPr>
-              <a:t>小组成员：zyj、cyj、zdh、zy | 2026-06-14</a:t>
+              <a:t>小组成员：zyj、cyy、zdh、zy | 2026-06-14</a:t>
             </a:r>
           </a:p>
         </p:txBody>
@@ -4040,7 +4040,7 @@
               </a:defRPr>
             </a:pPr>
             <a:r>
-              <a:t>PHM/NASA 类 score 是挑战赛惩罚函数，不等同于 Huang 论文原版 Score。</a:t>
+              <a:t>PHM/RUL 非对称惩罚 score 是挑战赛惩罚函数，不等同于 Huang 论文原版 Score。</a:t>
             </a:r>
           </a:p>
           <a:p>

--- a/docx/final/工业轴承设备剩余寿命预测系统的实现-结题答辩.pptx
+++ b/docx/final/工业轴承设备剩余寿命预测系统的实现-结题答辩.pptx
@@ -3283,7 +3283,7 @@
                 </a:solidFill>
                 <a:latin typeface="PingFang SC"/>
               </a:rPr>
-              <a:t>小组成员：zyj、cyy、zdh、zy | 2026-06-14</a:t>
+              <a:t>小组成员：zyj、cyj、zdh、zy | 2026-06-14</a:t>
             </a:r>
           </a:p>
         </p:txBody>
@@ -4040,7 +4040,7 @@
               </a:defRPr>
             </a:pPr>
             <a:r>
-              <a:t>PHM/RUL 非对称惩罚 score 是挑战赛惩罚函数，不等同于 Huang 论文原版 Score。</a:t>
+              <a:t>PHM/NASA 类 score 是挑战赛惩罚函数，不等同于 Huang 论文原版 Score。</a:t>
             </a:r>
           </a:p>
           <a:p>
@@ -4072,7 +4072,7 @@
               </a:defRPr>
             </a:pPr>
             <a:r>
-              <a:t>小样本复现的主要价值是工程闭环和指标可落盘，不是追求论文表格完全相同。</a:t>
+              <a:t>96 快照抽样复现的主要价值是工程闭环、指标口径和 gap 表可复查，不把结果包装成作者全量训练。</a:t>
             </a:r>
           </a:p>
         </p:txBody>
@@ -4402,7 +4402,7 @@
                 </a:solidFill>
                 <a:latin typeface="PingFang SC"/>
               </a:rPr>
-              <a:t>31</a:t>
+              <a:t>39</a:t>
             </a:r>
           </a:p>
         </p:txBody>
@@ -4747,7 +4747,7 @@
                 </a:solidFill>
                 <a:latin typeface="PingFang SC"/>
               </a:rPr>
-              <a:t>8</a:t>
+              <a:t>50</a:t>
             </a:r>
           </a:p>
         </p:txBody>
@@ -4782,7 +4782,7 @@
                 </a:solidFill>
                 <a:latin typeface="PingFang SC"/>
               </a:rPr>
-              <a:t>真实训练 epoch</a:t>
+              <a:t>正式训练 epoch</a:t>
             </a:r>
           </a:p>
         </p:txBody>
@@ -6667,7 +6667,7 @@
                 </a:solidFill>
                 <a:latin typeface="PingFang SC"/>
               </a:rPr>
-              <a:t>小样本、8 epoch、CPU 友好验收</a:t>
+              <a:t>96 快照抽样、单次训练、本机算力约束</a:t>
             </a:r>
           </a:p>
         </p:txBody>
@@ -6701,7 +6701,7 @@
                 </a:solidFill>
                 <a:latin typeface="PingFang SC"/>
               </a:rPr>
-              <a:t>验证流程，不冒充完整论文数值</a:t>
+              <a:t>验证流程，不冒充作者全量训练</a:t>
             </a:r>
           </a:p>
         </p:txBody>
@@ -7255,7 +7255,7 @@
                 </a:solidFill>
                 <a:latin typeface="PingFang SC"/>
               </a:rPr>
-              <a:t>小样本 8 epoch，未做多随机种子统计</a:t>
+              <a:t>96 快照抽样，未做多随机种子统计</a:t>
             </a:r>
           </a:p>
         </p:txBody>
@@ -7539,7 +7539,7 @@
                 </a:solidFill>
                 <a:latin typeface="PingFang SC"/>
               </a:rPr>
-              <a:t>我们完成的是课程项目级真实训练复现和工程闭环，不把小样本结果包装成论文完整数值复现。</a:t>
+              <a:t>我们完成的是课程项目级真实训练复现和工程闭环，不把 96 快照抽样结果包装成作者全量训练。</a:t>
             </a:r>
           </a:p>
         </p:txBody>
@@ -8214,7 +8214,7 @@
                 </a:solidFill>
                 <a:latin typeface="PingFang SC"/>
               </a:rPr>
-              <a:t>31</a:t>
+              <a:t>39</a:t>
             </a:r>
           </a:p>
         </p:txBody>
@@ -8249,7 +8249,7 @@
                 </a:solidFill>
                 <a:latin typeface="PingFang SC"/>
               </a:rPr>
-              <a:t>自动化测试通过</a:t>
+              <a:t>全量测试通过</a:t>
             </a:r>
           </a:p>
         </p:txBody>
@@ -8423,7 +8423,7 @@
                 </a:solidFill>
                 <a:latin typeface="PingFang SC"/>
               </a:rPr>
-              <a:t>问题定义：为什么是 RUL</a:t>
+              <a:t>任务定义：预测剩余寿命</a:t>
             </a:r>
           </a:p>
         </p:txBody>
@@ -8882,7 +8882,7 @@
                 </a:solidFill>
                 <a:latin typeface="PingFang SC"/>
               </a:rPr>
-              <a:t>两个数据集都是 run-to-failure 退化过程，天然适合 RUL、健康指标和生存概率分析。</a:t>
+              <a:t>两个数据集都记录轴承从正常运行到失效前的采样过程，适合构造 RUL 标签和健康趋势。</a:t>
             </a:r>
           </a:p>
         </p:txBody>
@@ -13098,7 +13098,7 @@
                 </a:solidFill>
                 <a:latin typeface="PingFang SC"/>
               </a:rPr>
-              <a:t>系统不只是完成 CSV 读取，而是把不同数据集的采样周期、工况、通道和 RUL 单位统一到了后续训练接口。</a:t>
+              <a:t>系统处理的是按时间采集的退化轨迹，先统一采样周期、工况、通道和 RUL 单位，再进入训练接口。</a:t>
             </a:r>
           </a:p>
         </p:txBody>
@@ -13929,7 +13929,7 @@
                 </a:solidFill>
                 <a:latin typeface="PingFang SC"/>
               </a:rPr>
-              <a:t>Bearing1_5，8 epoch 小样本真实训练</a:t>
+              <a:t>condition_1，50 epoch，92 条预测</a:t>
             </a:r>
           </a:p>
         </p:txBody>
@@ -13963,7 +13963,7 @@
                 </a:solidFill>
                 <a:latin typeface="PingFang SC"/>
               </a:rPr>
-              <a:t>CNN-LSTM-AM RMSE 406.30</a:t>
+              <a:t>CNN-LSTM-AM NormalizedRMSE 0.1465</a:t>
             </a:r>
           </a:p>
         </p:txBody>
@@ -14076,7 +14076,7 @@
                 </a:solidFill>
                 <a:latin typeface="PingFang SC"/>
               </a:rPr>
-              <a:t>Bearing3_1，8 epoch 小样本真实训练</a:t>
+              <a:t>condition_1，50 epoch，92 条预测</a:t>
             </a:r>
           </a:p>
         </p:txBody>
@@ -14110,7 +14110,7 @@
                 </a:solidFill>
                 <a:latin typeface="PingFang SC"/>
               </a:rPr>
-              <a:t>CNN-LSTM-AM RMSE 651.04</a:t>
+              <a:t>CNN-LSTM-AM NormalizedRMSE 0.2222</a:t>
             </a:r>
           </a:p>
         </p:txBody>
@@ -14629,7 +14629,7 @@
                 </a:solidFill>
                 <a:latin typeface="PingFang SC"/>
               </a:rPr>
-              <a:t>为什么选它</a:t>
+              <a:t>选择依据</a:t>
             </a:r>
           </a:p>
         </p:txBody>
@@ -14819,7 +14819,7 @@
                 </a:solidFill>
                 <a:latin typeface="PingFang SC"/>
               </a:rPr>
-              <a:t>XLSTM-Transformer = 指数门控 memory 分支 + Transformer encoder + RUL head。</a:t>
+              <a:t>XLSTM-Transformer = 指数门控 memory 分支 + Transformer encoder + RUL head，并追加快照时间索引特征。</a:t>
             </a:r>
           </a:p>
         </p:txBody>
@@ -14989,7 +14989,7 @@
         <p:spPr>
           <a:xfrm>
             <a:off x="777240" y="3063240"/>
-            <a:ext cx="10789920" cy="530352"/>
+            <a:ext cx="10789920" cy="438912"/>
           </a:xfrm>
           <a:prstGeom prst="rect">
             <a:avLst/>
@@ -15135,8 +15135,8 @@
         </p:nvSpPr>
         <p:spPr>
           <a:xfrm>
-            <a:off x="777240" y="3630168"/>
-            <a:ext cx="10789920" cy="530352"/>
+            <a:off x="777240" y="3538728"/>
+            <a:ext cx="10789920" cy="438912"/>
           </a:xfrm>
           <a:prstGeom prst="rect">
             <a:avLst/>
@@ -15180,7 +15180,7 @@
         </p:nvSpPr>
         <p:spPr>
           <a:xfrm>
-            <a:off x="914400" y="3730752"/>
+            <a:off x="914400" y="3639312"/>
             <a:ext cx="2514600" cy="182880"/>
           </a:xfrm>
           <a:prstGeom prst="rect">
@@ -15214,7 +15214,7 @@
         </p:nvSpPr>
         <p:spPr>
           <a:xfrm>
-            <a:off x="3611880" y="3730752"/>
+            <a:off x="3611880" y="3639312"/>
             <a:ext cx="3749039" cy="182880"/>
           </a:xfrm>
           <a:prstGeom prst="rect">
@@ -15248,7 +15248,7 @@
         </p:nvSpPr>
         <p:spPr>
           <a:xfrm>
-            <a:off x="7589520" y="3730752"/>
+            <a:off x="7589520" y="3639312"/>
             <a:ext cx="3657600" cy="182880"/>
           </a:xfrm>
           <a:prstGeom prst="rect">
@@ -15282,8 +15282,8 @@
         </p:nvSpPr>
         <p:spPr>
           <a:xfrm>
-            <a:off x="777240" y="4197096"/>
-            <a:ext cx="10789920" cy="530352"/>
+            <a:off x="777240" y="4014216"/>
+            <a:ext cx="10789920" cy="438912"/>
           </a:xfrm>
           <a:prstGeom prst="rect">
             <a:avLst/>
@@ -15327,7 +15327,7 @@
         </p:nvSpPr>
         <p:spPr>
           <a:xfrm>
-            <a:off x="914400" y="4297680"/>
+            <a:off x="914400" y="4114800"/>
             <a:ext cx="2514600" cy="182880"/>
           </a:xfrm>
           <a:prstGeom prst="rect">
@@ -15348,6 +15348,153 @@
                 </a:solidFill>
                 <a:latin typeface="PingFang SC"/>
               </a:rPr>
+              <a:t>代表结果</a:t>
+            </a:r>
+          </a:p>
+        </p:txBody>
+      </p:sp>
+      <p:sp>
+        <p:nvSpPr>
+          <p:cNvPr id="30" name="TextBox 29"/>
+          <p:cNvSpPr txBox="1"/>
+          <p:nvPr/>
+        </p:nvSpPr>
+        <p:spPr>
+          <a:xfrm>
+            <a:off x="3611880" y="4114800"/>
+            <a:ext cx="3749039" cy="182880"/>
+          </a:xfrm>
+          <a:prstGeom prst="rect">
+            <a:avLst/>
+          </a:prstGeom>
+          <a:noFill/>
+        </p:spPr>
+        <p:txBody>
+          <a:bodyPr wrap="square">
+            <a:spAutoFit/>
+          </a:bodyPr>
+          <a:lstStyle/>
+          <a:p>
+            <a:r>
+              <a:rPr sz="1200" b="0">
+                <a:solidFill>
+                  <a:srgbClr val="111827"/>
+                </a:solidFill>
+                <a:latin typeface="PingFang SC"/>
+              </a:rPr>
+              <a:t>XJTU-SY condition 1 NRMSE 0.0646，R2 0.9506</a:t>
+            </a:r>
+          </a:p>
+        </p:txBody>
+      </p:sp>
+      <p:sp>
+        <p:nvSpPr>
+          <p:cNvPr id="31" name="TextBox 30"/>
+          <p:cNvSpPr txBox="1"/>
+          <p:nvPr/>
+        </p:nvSpPr>
+        <p:spPr>
+          <a:xfrm>
+            <a:off x="7589520" y="4114800"/>
+            <a:ext cx="3657600" cy="182880"/>
+          </a:xfrm>
+          <a:prstGeom prst="rect">
+            <a:avLst/>
+          </a:prstGeom>
+          <a:noFill/>
+        </p:spPr>
+        <p:txBody>
+          <a:bodyPr wrap="square">
+            <a:spAutoFit/>
+          </a:bodyPr>
+          <a:lstStyle/>
+          <a:p>
+            <a:r>
+              <a:rPr sz="1200" b="0">
+                <a:solidFill>
+                  <a:srgbClr val="475569"/>
+                </a:solidFill>
+                <a:latin typeface="PingFang SC"/>
+              </a:rPr>
+              <a:t>PHM2012 condition 3 NRMSE 0.1076，R2 0.8640</a:t>
+            </a:r>
+          </a:p>
+        </p:txBody>
+      </p:sp>
+      <p:sp>
+        <p:nvSpPr>
+          <p:cNvPr id="32" name="Rectangle 31"/>
+          <p:cNvSpPr/>
+          <p:nvPr/>
+        </p:nvSpPr>
+        <p:spPr>
+          <a:xfrm>
+            <a:off x="777240" y="4489704"/>
+            <a:ext cx="10789920" cy="438912"/>
+          </a:xfrm>
+          <a:prstGeom prst="rect">
+            <a:avLst/>
+          </a:prstGeom>
+          <a:solidFill>
+            <a:srgbClr val="FFFFFF"/>
+          </a:solidFill>
+          <a:ln>
+            <a:solidFill>
+              <a:srgbClr val="E2E8F0"/>
+            </a:solidFill>
+          </a:ln>
+        </p:spPr>
+        <p:style>
+          <a:lnRef idx="1">
+            <a:schemeClr val="accent1"/>
+          </a:lnRef>
+          <a:fillRef idx="3">
+            <a:schemeClr val="accent1"/>
+          </a:fillRef>
+          <a:effectRef idx="2">
+            <a:schemeClr val="accent1"/>
+          </a:effectRef>
+          <a:fontRef idx="minor">
+            <a:schemeClr val="lt1"/>
+          </a:fontRef>
+        </p:style>
+        <p:txBody>
+          <a:bodyPr rtlCol="0" anchor="ctr"/>
+          <a:lstStyle/>
+          <a:p>
+            <a:pPr algn="ctr"/>
+          </a:p>
+        </p:txBody>
+      </p:sp>
+      <p:sp>
+        <p:nvSpPr>
+          <p:cNvPr id="33" name="TextBox 32"/>
+          <p:cNvSpPr txBox="1"/>
+          <p:nvPr/>
+        </p:nvSpPr>
+        <p:spPr>
+          <a:xfrm>
+            <a:off x="914400" y="4590288"/>
+            <a:ext cx="2514600" cy="182880"/>
+          </a:xfrm>
+          <a:prstGeom prst="rect">
+            <a:avLst/>
+          </a:prstGeom>
+          <a:noFill/>
+        </p:spPr>
+        <p:txBody>
+          <a:bodyPr wrap="square">
+            <a:spAutoFit/>
+          </a:bodyPr>
+          <a:lstStyle/>
+          <a:p>
+            <a:r>
+              <a:rPr sz="1200" b="1">
+                <a:solidFill>
+                  <a:srgbClr val="111827"/>
+                </a:solidFill>
+                <a:latin typeface="PingFang SC"/>
+              </a:rPr>
               <a:t>边界</a:t>
             </a:r>
           </a:p>
@@ -15355,13 +15502,13 @@
       </p:sp>
       <p:sp>
         <p:nvSpPr>
-          <p:cNvPr id="30" name="TextBox 29"/>
-          <p:cNvSpPr txBox="1"/>
-          <p:nvPr/>
-        </p:nvSpPr>
-        <p:spPr>
-          <a:xfrm>
-            <a:off x="3611880" y="4297680"/>
+          <p:cNvPr id="34" name="TextBox 33"/>
+          <p:cNvSpPr txBox="1"/>
+          <p:nvPr/>
+        </p:nvSpPr>
+        <p:spPr>
+          <a:xfrm>
+            <a:off x="3611880" y="4590288"/>
             <a:ext cx="3749039" cy="182880"/>
           </a:xfrm>
           <a:prstGeom prst="rect">
@@ -15382,20 +15529,20 @@
                 </a:solidFill>
                 <a:latin typeface="PingFang SC"/>
               </a:rPr>
-              <a:t>论文结构 + 项目特征管线适配</a:t>
-            </a:r>
-          </a:p>
-        </p:txBody>
-      </p:sp>
-      <p:sp>
-        <p:nvSpPr>
-          <p:cNvPr id="31" name="TextBox 30"/>
-          <p:cNvSpPr txBox="1"/>
-          <p:nvPr/>
-        </p:nvSpPr>
-        <p:spPr>
-          <a:xfrm>
-            <a:off x="7589520" y="4297680"/>
+              <a:t>PHM2012 condition 2 NRMSE 0.3742，R2 -0.6439</a:t>
+            </a:r>
+          </a:p>
+        </p:txBody>
+      </p:sp>
+      <p:sp>
+        <p:nvSpPr>
+          <p:cNvPr id="35" name="TextBox 34"/>
+          <p:cNvSpPr txBox="1"/>
+          <p:nvPr/>
+        </p:nvSpPr>
+        <p:spPr>
+          <a:xfrm>
+            <a:off x="7589520" y="4590288"/>
             <a:ext cx="3657600" cy="182880"/>
           </a:xfrm>
           <a:prstGeom prst="rect">
@@ -15416,7 +15563,7 @@
                 </a:solidFill>
                 <a:latin typeface="PingFang SC"/>
               </a:rPr>
-              <a:t>非作者源码逐行复刻</a:t>
+              <a:t>Score 尺度仍有明显 gap</a:t>
             </a:r>
           </a:p>
         </p:txBody>

--- a/docx/final/工业轴承设备剩余寿命预测系统的实现-结题答辩.pptx
+++ b/docx/final/工业轴承设备剩余寿命预测系统的实现-结题答辩.pptx
@@ -19,6 +19,7 @@
     <p:sldId id="267" r:id="rId18"/>
     <p:sldId id="268" r:id="rId19"/>
     <p:sldId id="269" r:id="rId20"/>
+    <p:sldId id="270" r:id="rId21"/>
   </p:sldIdLst>
   <p:sldSz cx="5765800" cy="3244850" type="screen4x3"/>
   <p:notesSz cx="6858000" cy="9144000"/>
@@ -3283,7 +3284,7 @@
                 </a:solidFill>
                 <a:latin typeface="PingFang SC"/>
               </a:rPr>
-              <a:t>小组成员：zyj、cyj、zdh、zy | 2026-06-14</a:t>
+              <a:t>小组成员：zyj、cyj、zdh、zy | 2026-06-17</a:t>
             </a:r>
           </a:p>
         </p:txBody>
@@ -3386,7 +3387,7 @@
                 </a:solidFill>
                 <a:latin typeface="PingFang SC"/>
               </a:rPr>
-              <a:t>评价指标：不混淆 Score 口径</a:t>
+              <a:t>指标驱动补充实验：结果和边界</a:t>
             </a:r>
           </a:p>
         </p:txBody>
@@ -3540,16 +3541,16 @@
       </p:sp>
       <p:sp>
         <p:nvSpPr>
-          <p:cNvPr id="8" name="Rounded Rectangle 7"/>
+          <p:cNvPr id="8" name="Rectangle 7"/>
           <p:cNvSpPr/>
           <p:nvPr/>
         </p:nvSpPr>
         <p:spPr>
           <a:xfrm>
-            <a:off x="685800" y="960120"/>
-            <a:ext cx="3337560" cy="1737360"/>
-          </a:xfrm>
-          <a:prstGeom prst="roundRect">
+            <a:off x="685800" y="932688"/>
+            <a:ext cx="10789920" cy="557784"/>
+          </a:xfrm>
+          <a:prstGeom prst="rect">
             <a:avLst/>
           </a:prstGeom>
           <a:solidFill>
@@ -3585,131 +3586,122 @@
       </p:sp>
       <p:sp>
         <p:nvSpPr>
-          <p:cNvPr id="9" name="Rectangle 8"/>
+          <p:cNvPr id="9" name="TextBox 8"/>
+          <p:cNvSpPr txBox="1"/>
+          <p:nvPr/>
+        </p:nvSpPr>
+        <p:spPr>
+          <a:xfrm>
+            <a:off x="822960" y="1033272"/>
+            <a:ext cx="2514600" cy="182880"/>
+          </a:xfrm>
+          <a:prstGeom prst="rect">
+            <a:avLst/>
+          </a:prstGeom>
+          <a:noFill/>
+        </p:spPr>
+        <p:txBody>
+          <a:bodyPr wrap="square">
+            <a:spAutoFit/>
+          </a:bodyPr>
+          <a:lstStyle/>
+          <a:p>
+            <a:r>
+              <a:rPr sz="1200" b="1">
+                <a:solidFill>
+                  <a:srgbClr val="111827"/>
+                </a:solidFill>
+                <a:latin typeface="PingFang SC"/>
+              </a:rPr>
+              <a:t>tsfresh</a:t>
+            </a:r>
+          </a:p>
+        </p:txBody>
+      </p:sp>
+      <p:sp>
+        <p:nvSpPr>
+          <p:cNvPr id="10" name="TextBox 9"/>
+          <p:cNvSpPr txBox="1"/>
+          <p:nvPr/>
+        </p:nvSpPr>
+        <p:spPr>
+          <a:xfrm>
+            <a:off x="3520440" y="1033272"/>
+            <a:ext cx="3749039" cy="182880"/>
+          </a:xfrm>
+          <a:prstGeom prst="rect">
+            <a:avLst/>
+          </a:prstGeom>
+          <a:noFill/>
+        </p:spPr>
+        <p:txBody>
+          <a:bodyPr wrap="square">
+            <a:spAutoFit/>
+          </a:bodyPr>
+          <a:lstStyle/>
+          <a:p>
+            <a:r>
+              <a:rPr sz="1200" b="0">
+                <a:solidFill>
+                  <a:srgbClr val="111827"/>
+                </a:solidFill>
+                <a:latin typeface="PingFang SC"/>
+              </a:rPr>
+              <a:t>selected features + RandomForest mean NRMSE 0.315629</a:t>
+            </a:r>
+          </a:p>
+        </p:txBody>
+      </p:sp>
+      <p:sp>
+        <p:nvSpPr>
+          <p:cNvPr id="11" name="TextBox 10"/>
+          <p:cNvSpPr txBox="1"/>
+          <p:nvPr/>
+        </p:nvSpPr>
+        <p:spPr>
+          <a:xfrm>
+            <a:off x="7498079" y="1033272"/>
+            <a:ext cx="3657600" cy="182880"/>
+          </a:xfrm>
+          <a:prstGeom prst="rect">
+            <a:avLst/>
+          </a:prstGeom>
+          <a:noFill/>
+        </p:spPr>
+        <p:txBody>
+          <a:bodyPr wrap="square">
+            <a:spAutoFit/>
+          </a:bodyPr>
+          <a:lstStyle/>
+          <a:p>
+            <a:r>
+              <a:rPr sz="1200" b="0">
+                <a:solidFill>
+                  <a:srgbClr val="475569"/>
+                </a:solidFill>
+                <a:latin typeface="PingFang SC"/>
+              </a:rPr>
+              <a:t>相关性整体偏弱，不是核心性能突破</a:t>
+            </a:r>
+          </a:p>
+        </p:txBody>
+      </p:sp>
+      <p:sp>
+        <p:nvSpPr>
+          <p:cNvPr id="12" name="Rectangle 11"/>
           <p:cNvSpPr/>
           <p:nvPr/>
         </p:nvSpPr>
         <p:spPr>
           <a:xfrm>
-            <a:off x="685800" y="960120"/>
-            <a:ext cx="91440" cy="1737360"/>
+            <a:off x="685800" y="1527048"/>
+            <a:ext cx="10789920" cy="557784"/>
           </a:xfrm>
           <a:prstGeom prst="rect">
             <a:avLst/>
           </a:prstGeom>
           <a:solidFill>
-            <a:srgbClr val="2563EB"/>
-          </a:solidFill>
-          <a:ln>
-            <a:noFill/>
-          </a:ln>
-        </p:spPr>
-        <p:style>
-          <a:lnRef idx="1">
-            <a:schemeClr val="accent1"/>
-          </a:lnRef>
-          <a:fillRef idx="3">
-            <a:schemeClr val="accent1"/>
-          </a:fillRef>
-          <a:effectRef idx="2">
-            <a:schemeClr val="accent1"/>
-          </a:effectRef>
-          <a:fontRef idx="minor">
-            <a:schemeClr val="lt1"/>
-          </a:fontRef>
-        </p:style>
-        <p:txBody>
-          <a:bodyPr rtlCol="0" anchor="ctr"/>
-          <a:lstStyle/>
-          <a:p>
-            <a:pPr algn="ctr"/>
-          </a:p>
-        </p:txBody>
-      </p:sp>
-      <p:sp>
-        <p:nvSpPr>
-          <p:cNvPr id="10" name="TextBox 9"/>
-          <p:cNvSpPr txBox="1"/>
-          <p:nvPr/>
-        </p:nvSpPr>
-        <p:spPr>
-          <a:xfrm>
-            <a:off x="886968" y="1078992"/>
-            <a:ext cx="3026664" cy="256032"/>
-          </a:xfrm>
-          <a:prstGeom prst="rect">
-            <a:avLst/>
-          </a:prstGeom>
-          <a:noFill/>
-        </p:spPr>
-        <p:txBody>
-          <a:bodyPr wrap="square">
-            <a:spAutoFit/>
-          </a:bodyPr>
-          <a:lstStyle/>
-          <a:p>
-            <a:r>
-              <a:rPr sz="1600" b="1">
-                <a:solidFill>
-                  <a:srgbClr val="2563EB"/>
-                </a:solidFill>
-                <a:latin typeface="PingFang SC"/>
-              </a:rPr>
-              <a:t>普通误差</a:t>
-            </a:r>
-          </a:p>
-        </p:txBody>
-      </p:sp>
-      <p:sp>
-        <p:nvSpPr>
-          <p:cNvPr id="11" name="TextBox 10"/>
-          <p:cNvSpPr txBox="1"/>
-          <p:nvPr/>
-        </p:nvSpPr>
-        <p:spPr>
-          <a:xfrm>
-            <a:off x="886968" y="1399032"/>
-            <a:ext cx="3008376" cy="1225295"/>
-          </a:xfrm>
-          <a:prstGeom prst="rect">
-            <a:avLst/>
-          </a:prstGeom>
-          <a:noFill/>
-        </p:spPr>
-        <p:txBody>
-          <a:bodyPr wrap="square">
-            <a:spAutoFit/>
-          </a:bodyPr>
-          <a:lstStyle/>
-          <a:p>
-            <a:r>
-              <a:rPr sz="1200" b="0">
-                <a:solidFill>
-                  <a:srgbClr val="111827"/>
-                </a:solidFill>
-                <a:latin typeface="PingFang SC"/>
-              </a:rPr>
-              <a:t>MAE、RMSE、NormalizedRMSE、SMAPE、R2：回答预测偏差有多大。</a:t>
-            </a:r>
-          </a:p>
-        </p:txBody>
-      </p:sp>
-      <p:sp>
-        <p:nvSpPr>
-          <p:cNvPr id="12" name="Rounded Rectangle 11"/>
-          <p:cNvSpPr/>
-          <p:nvPr/>
-        </p:nvSpPr>
-        <p:spPr>
-          <a:xfrm>
-            <a:off x="4389120" y="960120"/>
-            <a:ext cx="3337560" cy="1737360"/>
-          </a:xfrm>
-          <a:prstGeom prst="roundRect">
-            <a:avLst/>
-          </a:prstGeom>
-          <a:solidFill>
-            <a:srgbClr val="F0FDF4"/>
+            <a:srgbClr val="FFFFFF"/>
           </a:solidFill>
           <a:ln>
             <a:solidFill>
@@ -3741,131 +3733,122 @@
       </p:sp>
       <p:sp>
         <p:nvSpPr>
-          <p:cNvPr id="13" name="Rectangle 12"/>
+          <p:cNvPr id="13" name="TextBox 12"/>
+          <p:cNvSpPr txBox="1"/>
+          <p:nvPr/>
+        </p:nvSpPr>
+        <p:spPr>
+          <a:xfrm>
+            <a:off x="822960" y="1627632"/>
+            <a:ext cx="2514600" cy="182880"/>
+          </a:xfrm>
+          <a:prstGeom prst="rect">
+            <a:avLst/>
+          </a:prstGeom>
+          <a:noFill/>
+        </p:spPr>
+        <p:txBody>
+          <a:bodyPr wrap="square">
+            <a:spAutoFit/>
+          </a:bodyPr>
+          <a:lstStyle/>
+          <a:p>
+            <a:r>
+              <a:rPr sz="1200" b="1">
+                <a:solidFill>
+                  <a:srgbClr val="111827"/>
+                </a:solidFill>
+                <a:latin typeface="PingFang SC"/>
+              </a:rPr>
+              <a:t>sktime RocketRegressor</a:t>
+            </a:r>
+          </a:p>
+        </p:txBody>
+      </p:sp>
+      <p:sp>
+        <p:nvSpPr>
+          <p:cNvPr id="14" name="TextBox 13"/>
+          <p:cNvSpPr txBox="1"/>
+          <p:nvPr/>
+        </p:nvSpPr>
+        <p:spPr>
+          <a:xfrm>
+            <a:off x="3520440" y="1627632"/>
+            <a:ext cx="3749039" cy="182880"/>
+          </a:xfrm>
+          <a:prstGeom prst="rect">
+            <a:avLst/>
+          </a:prstGeom>
+          <a:noFill/>
+        </p:spPr>
+        <p:txBody>
+          <a:bodyPr wrap="square">
+            <a:spAutoFit/>
+          </a:bodyPr>
+          <a:lstStyle/>
+          <a:p>
+            <a:r>
+              <a:rPr sz="1200" b="0">
+                <a:solidFill>
+                  <a:srgbClr val="111827"/>
+                </a:solidFill>
+                <a:latin typeface="PingFang SC"/>
+              </a:rPr>
+              <a:t>held-out Bearing1_3 mean NRMSE 0.263706</a:t>
+            </a:r>
+          </a:p>
+        </p:txBody>
+      </p:sp>
+      <p:sp>
+        <p:nvSpPr>
+          <p:cNvPr id="15" name="TextBox 14"/>
+          <p:cNvSpPr txBox="1"/>
+          <p:nvPr/>
+        </p:nvSpPr>
+        <p:spPr>
+          <a:xfrm>
+            <a:off x="7498079" y="1627632"/>
+            <a:ext cx="3657600" cy="182880"/>
+          </a:xfrm>
+          <a:prstGeom prst="rect">
+            <a:avLst/>
+          </a:prstGeom>
+          <a:noFill/>
+        </p:spPr>
+        <p:txBody>
+          <a:bodyPr wrap="square">
+            <a:spAutoFit/>
+          </a:bodyPr>
+          <a:lstStyle/>
+          <a:p>
+            <a:r>
+              <a:rPr sz="1200" b="0">
+                <a:solidFill>
+                  <a:srgbClr val="475569"/>
+                </a:solidFill>
+                <a:latin typeface="PingFang SC"/>
+              </a:rPr>
+              <a:t>当前优于 tsfresh RF，是补充 baseline</a:t>
+            </a:r>
+          </a:p>
+        </p:txBody>
+      </p:sp>
+      <p:sp>
+        <p:nvSpPr>
+          <p:cNvPr id="16" name="Rectangle 15"/>
           <p:cNvSpPr/>
           <p:nvPr/>
         </p:nvSpPr>
         <p:spPr>
           <a:xfrm>
-            <a:off x="4389120" y="960120"/>
-            <a:ext cx="91440" cy="1737360"/>
+            <a:off x="685800" y="2121408"/>
+            <a:ext cx="10789920" cy="557784"/>
           </a:xfrm>
           <a:prstGeom prst="rect">
             <a:avLst/>
           </a:prstGeom>
           <a:solidFill>
-            <a:srgbClr val="16A34A"/>
-          </a:solidFill>
-          <a:ln>
-            <a:noFill/>
-          </a:ln>
-        </p:spPr>
-        <p:style>
-          <a:lnRef idx="1">
-            <a:schemeClr val="accent1"/>
-          </a:lnRef>
-          <a:fillRef idx="3">
-            <a:schemeClr val="accent1"/>
-          </a:fillRef>
-          <a:effectRef idx="2">
-            <a:schemeClr val="accent1"/>
-          </a:effectRef>
-          <a:fontRef idx="minor">
-            <a:schemeClr val="lt1"/>
-          </a:fontRef>
-        </p:style>
-        <p:txBody>
-          <a:bodyPr rtlCol="0" anchor="ctr"/>
-          <a:lstStyle/>
-          <a:p>
-            <a:pPr algn="ctr"/>
-          </a:p>
-        </p:txBody>
-      </p:sp>
-      <p:sp>
-        <p:nvSpPr>
-          <p:cNvPr id="14" name="TextBox 13"/>
-          <p:cNvSpPr txBox="1"/>
-          <p:nvPr/>
-        </p:nvSpPr>
-        <p:spPr>
-          <a:xfrm>
-            <a:off x="4590288" y="1078992"/>
-            <a:ext cx="3026664" cy="256032"/>
-          </a:xfrm>
-          <a:prstGeom prst="rect">
-            <a:avLst/>
-          </a:prstGeom>
-          <a:noFill/>
-        </p:spPr>
-        <p:txBody>
-          <a:bodyPr wrap="square">
-            <a:spAutoFit/>
-          </a:bodyPr>
-          <a:lstStyle/>
-          <a:p>
-            <a:r>
-              <a:rPr sz="1600" b="1">
-                <a:solidFill>
-                  <a:srgbClr val="16A34A"/>
-                </a:solidFill>
-                <a:latin typeface="PingFang SC"/>
-              </a:rPr>
-              <a:t>论文 Score</a:t>
-            </a:r>
-          </a:p>
-        </p:txBody>
-      </p:sp>
-      <p:sp>
-        <p:nvSpPr>
-          <p:cNvPr id="15" name="TextBox 14"/>
-          <p:cNvSpPr txBox="1"/>
-          <p:nvPr/>
-        </p:nvSpPr>
-        <p:spPr>
-          <a:xfrm>
-            <a:off x="4590288" y="1399032"/>
-            <a:ext cx="3008376" cy="1225295"/>
-          </a:xfrm>
-          <a:prstGeom prst="rect">
-            <a:avLst/>
-          </a:prstGeom>
-          <a:noFill/>
-        </p:spPr>
-        <p:txBody>
-          <a:bodyPr wrap="square">
-            <a:spAutoFit/>
-          </a:bodyPr>
-          <a:lstStyle/>
-          <a:p>
-            <a:r>
-              <a:rPr sz="1200" b="0">
-                <a:solidFill>
-                  <a:srgbClr val="111827"/>
-                </a:solidFill>
-                <a:latin typeface="PingFang SC"/>
-              </a:rPr>
-              <a:t>HuangRulScore 按 Er_i = 100*(target-prediction)/target 分段指数公式。</a:t>
-            </a:r>
-          </a:p>
-        </p:txBody>
-      </p:sp>
-      <p:sp>
-        <p:nvSpPr>
-          <p:cNvPr id="16" name="Rounded Rectangle 15"/>
-          <p:cNvSpPr/>
-          <p:nvPr/>
-        </p:nvSpPr>
-        <p:spPr>
-          <a:xfrm>
-            <a:off x="8092440" y="960120"/>
-            <a:ext cx="3337560" cy="1737360"/>
-          </a:xfrm>
-          <a:prstGeom prst="roundRect">
-            <a:avLst/>
-          </a:prstGeom>
-          <a:solidFill>
-            <a:srgbClr val="FFF7ED"/>
+            <a:srgbClr val="EFF6FF"/>
           </a:solidFill>
           <a:ln>
             <a:solidFill>
@@ -3897,23 +3880,127 @@
       </p:sp>
       <p:sp>
         <p:nvSpPr>
-          <p:cNvPr id="17" name="Rectangle 16"/>
+          <p:cNvPr id="17" name="TextBox 16"/>
+          <p:cNvSpPr txBox="1"/>
+          <p:nvPr/>
+        </p:nvSpPr>
+        <p:spPr>
+          <a:xfrm>
+            <a:off x="822960" y="2221992"/>
+            <a:ext cx="2514600" cy="182880"/>
+          </a:xfrm>
+          <a:prstGeom prst="rect">
+            <a:avLst/>
+          </a:prstGeom>
+          <a:noFill/>
+        </p:spPr>
+        <p:txBody>
+          <a:bodyPr wrap="square">
+            <a:spAutoFit/>
+          </a:bodyPr>
+          <a:lstStyle/>
+          <a:p>
+            <a:r>
+              <a:rPr sz="1200" b="1">
+                <a:solidFill>
+                  <a:srgbClr val="111827"/>
+                </a:solidFill>
+                <a:latin typeface="PingFang SC"/>
+              </a:rPr>
+              <a:t>RULSurv row-level</a:t>
+            </a:r>
+          </a:p>
+        </p:txBody>
+      </p:sp>
+      <p:sp>
+        <p:nvSpPr>
+          <p:cNvPr id="18" name="TextBox 17"/>
+          <p:cNvSpPr txBox="1"/>
+          <p:nvPr/>
+        </p:nvSpPr>
+        <p:spPr>
+          <a:xfrm>
+            <a:off x="3520440" y="2221992"/>
+            <a:ext cx="3749039" cy="182880"/>
+          </a:xfrm>
+          <a:prstGeom prst="rect">
+            <a:avLst/>
+          </a:prstGeom>
+          <a:noFill/>
+        </p:spPr>
+        <p:txBody>
+          <a:bodyPr wrap="square">
+            <a:spAutoFit/>
+          </a:bodyPr>
+          <a:lstStyle/>
+          <a:p>
+            <a:r>
+              <a:rPr sz="1200" b="0">
+                <a:solidFill>
+                  <a:srgbClr val="111827"/>
+                </a:solidFill>
+                <a:latin typeface="PingFang SC"/>
+              </a:rPr>
+              <a:t>25% censored CV mean true MAE 6.926416 min</a:t>
+            </a:r>
+          </a:p>
+        </p:txBody>
+      </p:sp>
+      <p:sp>
+        <p:nvSpPr>
+          <p:cNvPr id="19" name="TextBox 18"/>
+          <p:cNvSpPr txBox="1"/>
+          <p:nvPr/>
+        </p:nvSpPr>
+        <p:spPr>
+          <a:xfrm>
+            <a:off x="7498079" y="2221992"/>
+            <a:ext cx="3657600" cy="182880"/>
+          </a:xfrm>
+          <a:prstGeom prst="rect">
+            <a:avLst/>
+          </a:prstGeom>
+          <a:noFill/>
+        </p:spPr>
+        <p:txBody>
+          <a:bodyPr wrap="square">
+            <a:spAutoFit/>
+          </a:bodyPr>
+          <a:lstStyle/>
+          <a:p>
+            <a:r>
+              <a:rPr sz="1200" b="0">
+                <a:solidFill>
+                  <a:srgbClr val="475569"/>
+                </a:solidFill>
+                <a:latin typeface="PingFang SC"/>
+              </a:rPr>
+              <a:t>PROTOCOL_PASS，但不是 held-out 泛化</a:t>
+            </a:r>
+          </a:p>
+        </p:txBody>
+      </p:sp>
+      <p:sp>
+        <p:nvSpPr>
+          <p:cNvPr id="20" name="Rectangle 19"/>
           <p:cNvSpPr/>
           <p:nvPr/>
         </p:nvSpPr>
         <p:spPr>
           <a:xfrm>
-            <a:off x="8092440" y="960120"/>
-            <a:ext cx="91440" cy="1737360"/>
+            <a:off x="685800" y="2715768"/>
+            <a:ext cx="10789920" cy="557784"/>
           </a:xfrm>
           <a:prstGeom prst="rect">
             <a:avLst/>
           </a:prstGeom>
           <a:solidFill>
-            <a:srgbClr val="F97316"/>
+            <a:srgbClr val="FFFFFF"/>
           </a:solidFill>
           <a:ln>
-            <a:noFill/>
+            <a:solidFill>
+              <a:srgbClr val="E2E8F0"/>
+            </a:solidFill>
           </a:ln>
         </p:spPr>
         <p:style>
@@ -3940,14 +4027,351 @@
       </p:sp>
       <p:sp>
         <p:nvSpPr>
-          <p:cNvPr id="18" name="TextBox 17"/>
-          <p:cNvSpPr txBox="1"/>
-          <p:nvPr/>
-        </p:nvSpPr>
-        <p:spPr>
-          <a:xfrm>
-            <a:off x="8293608" y="1078992"/>
-            <a:ext cx="3026664" cy="256032"/>
+          <p:cNvPr id="21" name="TextBox 20"/>
+          <p:cNvSpPr txBox="1"/>
+          <p:nvPr/>
+        </p:nvSpPr>
+        <p:spPr>
+          <a:xfrm>
+            <a:off x="822960" y="2816352"/>
+            <a:ext cx="2514600" cy="182880"/>
+          </a:xfrm>
+          <a:prstGeom prst="rect">
+            <a:avLst/>
+          </a:prstGeom>
+          <a:noFill/>
+        </p:spPr>
+        <p:txBody>
+          <a:bodyPr wrap="square">
+            <a:spAutoFit/>
+          </a:bodyPr>
+          <a:lstStyle/>
+          <a:p>
+            <a:r>
+              <a:rPr sz="1200" b="1">
+                <a:solidFill>
+                  <a:srgbClr val="111827"/>
+                </a:solidFill>
+                <a:latin typeface="PingFang SC"/>
+              </a:rPr>
+              <a:t>RULSurv held-out</a:t>
+            </a:r>
+          </a:p>
+        </p:txBody>
+      </p:sp>
+      <p:sp>
+        <p:nvSpPr>
+          <p:cNvPr id="22" name="TextBox 21"/>
+          <p:cNvSpPr txBox="1"/>
+          <p:nvPr/>
+        </p:nvSpPr>
+        <p:spPr>
+          <a:xfrm>
+            <a:off x="3520440" y="2816352"/>
+            <a:ext cx="3749039" cy="182880"/>
+          </a:xfrm>
+          <a:prstGeom prst="rect">
+            <a:avLst/>
+          </a:prstGeom>
+          <a:noFill/>
+        </p:spPr>
+        <p:txBody>
+          <a:bodyPr wrap="square">
+            <a:spAutoFit/>
+          </a:bodyPr>
+          <a:lstStyle/>
+          <a:p>
+            <a:r>
+              <a:rPr sz="1200" b="0">
+                <a:solidFill>
+                  <a:srgbClr val="111827"/>
+                </a:solidFill>
+                <a:latin typeface="PingFang SC"/>
+              </a:rPr>
+              <a:t>Bearing1_3 mean true MAE 14.307856 min</a:t>
+            </a:r>
+          </a:p>
+        </p:txBody>
+      </p:sp>
+      <p:sp>
+        <p:nvSpPr>
+          <p:cNvPr id="23" name="TextBox 22"/>
+          <p:cNvSpPr txBox="1"/>
+          <p:nvPr/>
+        </p:nvSpPr>
+        <p:spPr>
+          <a:xfrm>
+            <a:off x="7498079" y="2816352"/>
+            <a:ext cx="3657600" cy="182880"/>
+          </a:xfrm>
+          <a:prstGeom prst="rect">
+            <a:avLst/>
+          </a:prstGeom>
+          <a:noFill/>
+        </p:spPr>
+        <p:txBody>
+          <a:bodyPr wrap="square">
+            <a:spAutoFit/>
+          </a:bodyPr>
+          <a:lstStyle/>
+          <a:p>
+            <a:r>
+              <a:rPr sz="1200" b="0">
+                <a:solidFill>
+                  <a:srgbClr val="475569"/>
+                </a:solidFill>
+                <a:latin typeface="PingFang SC"/>
+              </a:rPr>
+              <a:t>MIGRATION_PASS，survival_probability=0.25 保守解码</a:t>
+            </a:r>
+          </a:p>
+        </p:txBody>
+      </p:sp>
+      <p:sp>
+        <p:nvSpPr>
+          <p:cNvPr id="24" name="Rectangle 23"/>
+          <p:cNvSpPr/>
+          <p:nvPr/>
+        </p:nvSpPr>
+        <p:spPr>
+          <a:xfrm>
+            <a:off x="685800" y="3310128"/>
+            <a:ext cx="10789920" cy="557784"/>
+          </a:xfrm>
+          <a:prstGeom prst="rect">
+            <a:avLst/>
+          </a:prstGeom>
+          <a:solidFill>
+            <a:srgbClr val="EFF6FF"/>
+          </a:solidFill>
+          <a:ln>
+            <a:solidFill>
+              <a:srgbClr val="E2E8F0"/>
+            </a:solidFill>
+          </a:ln>
+        </p:spPr>
+        <p:style>
+          <a:lnRef idx="1">
+            <a:schemeClr val="accent1"/>
+          </a:lnRef>
+          <a:fillRef idx="3">
+            <a:schemeClr val="accent1"/>
+          </a:fillRef>
+          <a:effectRef idx="2">
+            <a:schemeClr val="accent1"/>
+          </a:effectRef>
+          <a:fontRef idx="minor">
+            <a:schemeClr val="lt1"/>
+          </a:fontRef>
+        </p:style>
+        <p:txBody>
+          <a:bodyPr rtlCol="0" anchor="ctr"/>
+          <a:lstStyle/>
+          <a:p>
+            <a:pPr algn="ctr"/>
+          </a:p>
+        </p:txBody>
+      </p:sp>
+      <p:sp>
+        <p:nvSpPr>
+          <p:cNvPr id="25" name="TextBox 24"/>
+          <p:cNvSpPr txBox="1"/>
+          <p:nvPr/>
+        </p:nvSpPr>
+        <p:spPr>
+          <a:xfrm>
+            <a:off x="822960" y="3410712"/>
+            <a:ext cx="2514600" cy="182880"/>
+          </a:xfrm>
+          <a:prstGeom prst="rect">
+            <a:avLst/>
+          </a:prstGeom>
+          <a:noFill/>
+        </p:spPr>
+        <p:txBody>
+          <a:bodyPr wrap="square">
+            <a:spAutoFit/>
+          </a:bodyPr>
+          <a:lstStyle/>
+          <a:p>
+            <a:r>
+              <a:rPr sz="1200" b="1">
+                <a:solidFill>
+                  <a:srgbClr val="111827"/>
+                </a:solidFill>
+                <a:latin typeface="PingFang SC"/>
+              </a:rPr>
+              <a:t>外部 SOTA</a:t>
+            </a:r>
+          </a:p>
+        </p:txBody>
+      </p:sp>
+      <p:sp>
+        <p:nvSpPr>
+          <p:cNvPr id="26" name="TextBox 25"/>
+          <p:cNvSpPr txBox="1"/>
+          <p:nvPr/>
+        </p:nvSpPr>
+        <p:spPr>
+          <a:xfrm>
+            <a:off x="3520440" y="3410712"/>
+            <a:ext cx="3749039" cy="182880"/>
+          </a:xfrm>
+          <a:prstGeom prst="rect">
+            <a:avLst/>
+          </a:prstGeom>
+          <a:noFill/>
+        </p:spPr>
+        <p:txBody>
+          <a:bodyPr wrap="square">
+            <a:spAutoFit/>
+          </a:bodyPr>
+          <a:lstStyle/>
+          <a:p>
+            <a:r>
+              <a:rPr sz="1200" b="0">
+                <a:solidFill>
+                  <a:srgbClr val="111827"/>
+                </a:solidFill>
+                <a:latin typeface="PingFang SC"/>
+              </a:rPr>
+              <a:t>AutoRUL / GNN / Weibull 完成 source pin 与依赖 probe</a:t>
+            </a:r>
+          </a:p>
+        </p:txBody>
+      </p:sp>
+      <p:sp>
+        <p:nvSpPr>
+          <p:cNvPr id="27" name="TextBox 26"/>
+          <p:cNvSpPr txBox="1"/>
+          <p:nvPr/>
+        </p:nvSpPr>
+        <p:spPr>
+          <a:xfrm>
+            <a:off x="7498079" y="3410712"/>
+            <a:ext cx="3657600" cy="182880"/>
+          </a:xfrm>
+          <a:prstGeom prst="rect">
+            <a:avLst/>
+          </a:prstGeom>
+          <a:noFill/>
+        </p:spPr>
+        <p:txBody>
+          <a:bodyPr wrap="square">
+            <a:spAutoFit/>
+          </a:bodyPr>
+          <a:lstStyle/>
+          <a:p>
+            <a:r>
+              <a:rPr sz="1200" b="0">
+                <a:solidFill>
+                  <a:srgbClr val="475569"/>
+                </a:solidFill>
+                <a:latin typeface="PingFang SC"/>
+              </a:rPr>
+              <a:t>尚未在本地跑出指标，不能说已复现</a:t>
+            </a:r>
+          </a:p>
+        </p:txBody>
+      </p:sp>
+      <p:sp>
+        <p:nvSpPr>
+          <p:cNvPr id="28" name="Rounded Rectangle 27"/>
+          <p:cNvSpPr/>
+          <p:nvPr/>
+        </p:nvSpPr>
+        <p:spPr>
+          <a:xfrm>
+            <a:off x="822960" y="4983480"/>
+            <a:ext cx="10515600" cy="658368"/>
+          </a:xfrm>
+          <a:prstGeom prst="roundRect">
+            <a:avLst/>
+          </a:prstGeom>
+          <a:solidFill>
+            <a:srgbClr val="FFFFFF"/>
+          </a:solidFill>
+          <a:ln>
+            <a:solidFill>
+              <a:srgbClr val="E2E8F0"/>
+            </a:solidFill>
+          </a:ln>
+        </p:spPr>
+        <p:style>
+          <a:lnRef idx="1">
+            <a:schemeClr val="accent1"/>
+          </a:lnRef>
+          <a:fillRef idx="3">
+            <a:schemeClr val="accent1"/>
+          </a:fillRef>
+          <a:effectRef idx="2">
+            <a:schemeClr val="accent1"/>
+          </a:effectRef>
+          <a:fontRef idx="minor">
+            <a:schemeClr val="lt1"/>
+          </a:fontRef>
+        </p:style>
+        <p:txBody>
+          <a:bodyPr rtlCol="0" anchor="ctr"/>
+          <a:lstStyle/>
+          <a:p>
+            <a:pPr algn="ctr"/>
+          </a:p>
+        </p:txBody>
+      </p:sp>
+      <p:sp>
+        <p:nvSpPr>
+          <p:cNvPr id="29" name="Rectangle 28"/>
+          <p:cNvSpPr/>
+          <p:nvPr/>
+        </p:nvSpPr>
+        <p:spPr>
+          <a:xfrm>
+            <a:off x="822960" y="4983480"/>
+            <a:ext cx="91440" cy="658368"/>
+          </a:xfrm>
+          <a:prstGeom prst="rect">
+            <a:avLst/>
+          </a:prstGeom>
+          <a:solidFill>
+            <a:srgbClr val="DC2626"/>
+          </a:solidFill>
+          <a:ln>
+            <a:noFill/>
+          </a:ln>
+        </p:spPr>
+        <p:style>
+          <a:lnRef idx="1">
+            <a:schemeClr val="accent1"/>
+          </a:lnRef>
+          <a:fillRef idx="3">
+            <a:schemeClr val="accent1"/>
+          </a:fillRef>
+          <a:effectRef idx="2">
+            <a:schemeClr val="accent1"/>
+          </a:effectRef>
+          <a:fontRef idx="minor">
+            <a:schemeClr val="lt1"/>
+          </a:fontRef>
+        </p:style>
+        <p:txBody>
+          <a:bodyPr rtlCol="0" anchor="ctr"/>
+          <a:lstStyle/>
+          <a:p>
+            <a:pPr algn="ctr"/>
+          </a:p>
+        </p:txBody>
+      </p:sp>
+      <p:sp>
+        <p:nvSpPr>
+          <p:cNvPr id="30" name="TextBox 29"/>
+          <p:cNvSpPr txBox="1"/>
+          <p:nvPr/>
+        </p:nvSpPr>
+        <p:spPr>
+          <a:xfrm>
+            <a:off x="1024128" y="5102352"/>
+            <a:ext cx="10204704" cy="256032"/>
           </a:xfrm>
           <a:prstGeom prst="rect">
             <a:avLst/>
@@ -3963,116 +4387,45 @@
             <a:r>
               <a:rPr sz="1600" b="1">
                 <a:solidFill>
-                  <a:srgbClr val="F97316"/>
-                </a:solidFill>
-                <a:latin typeface="PingFang SC"/>
-              </a:rPr>
-              <a:t>解释性指标</a:t>
-            </a:r>
-          </a:p>
-        </p:txBody>
-      </p:sp>
-      <p:sp>
-        <p:nvSpPr>
-          <p:cNvPr id="19" name="TextBox 18"/>
-          <p:cNvSpPr txBox="1"/>
-          <p:nvPr/>
-        </p:nvSpPr>
-        <p:spPr>
-          <a:xfrm>
-            <a:off x="8293608" y="1399032"/>
-            <a:ext cx="3008376" cy="1225295"/>
-          </a:xfrm>
-          <a:prstGeom prst="rect">
-            <a:avLst/>
-          </a:prstGeom>
-          <a:noFill/>
-        </p:spPr>
-        <p:txBody>
-          <a:bodyPr wrap="square">
-            <a:spAutoFit/>
-          </a:bodyPr>
-          <a:lstStyle/>
-          <a:p>
-            <a:r>
-              <a:rPr sz="1200" b="0">
+                  <a:srgbClr val="DC2626"/>
+                </a:solidFill>
+                <a:latin typeface="PingFang SC"/>
+              </a:rPr>
+              <a:t>答辩底线</a:t>
+            </a:r>
+          </a:p>
+        </p:txBody>
+      </p:sp>
+      <p:sp>
+        <p:nvSpPr>
+          <p:cNvPr id="31" name="TextBox 30"/>
+          <p:cNvSpPr txBox="1"/>
+          <p:nvPr/>
+        </p:nvSpPr>
+        <p:spPr>
+          <a:xfrm>
+            <a:off x="1024128" y="5422392"/>
+            <a:ext cx="10186416" cy="146303"/>
+          </a:xfrm>
+          <a:prstGeom prst="rect">
+            <a:avLst/>
+          </a:prstGeom>
+          <a:noFill/>
+        </p:spPr>
+        <p:txBody>
+          <a:bodyPr wrap="square">
+            <a:spAutoFit/>
+          </a:bodyPr>
+          <a:lstStyle/>
+          <a:p>
+            <a:r>
+              <a:rPr sz="1300" b="0">
                 <a:solidFill>
                   <a:srgbClr val="111827"/>
                 </a:solidFill>
                 <a:latin typeface="PingFang SC"/>
               </a:rPr>
-              <a:t>Over/UnderPredictionRate、WithinToleranceRate：解释偏早/偏晚预测倾向。</a:t>
-            </a:r>
-          </a:p>
-        </p:txBody>
-      </p:sp>
-      <p:sp>
-        <p:nvSpPr>
-          <p:cNvPr id="20" name="TextBox 19"/>
-          <p:cNvSpPr txBox="1"/>
-          <p:nvPr/>
-        </p:nvSpPr>
-        <p:spPr>
-          <a:xfrm>
-            <a:off x="914400" y="3429000"/>
-            <a:ext cx="10058400" cy="5212080"/>
-          </a:xfrm>
-          <a:prstGeom prst="rect">
-            <a:avLst/>
-          </a:prstGeom>
-          <a:noFill/>
-        </p:spPr>
-        <p:txBody>
-          <a:bodyPr wrap="square" lIns="0">
-            <a:spAutoFit/>
-          </a:bodyPr>
-          <a:lstStyle/>
-          <a:p>
-            <a:pPr>
-              <a:spcAft>
-                <a:spcPts val="800"/>
-              </a:spcAft>
-              <a:defRPr sz="1600">
-                <a:solidFill>
-                  <a:srgbClr val="111827"/>
-                </a:solidFill>
-                <a:latin typeface="PingFang SC"/>
-              </a:defRPr>
-            </a:pPr>
-            <a:r>
-              <a:t>PHM/NASA 类 score 是挑战赛惩罚函数，不等同于 Huang 论文原版 Score。</a:t>
-            </a:r>
-          </a:p>
-          <a:p>
-            <a:pPr>
-              <a:spcAft>
-                <a:spcPts val="800"/>
-              </a:spcAft>
-              <a:defRPr sz="1600">
-                <a:solidFill>
-                  <a:srgbClr val="111827"/>
-                </a:solidFill>
-                <a:latin typeface="PingFang SC"/>
-              </a:defRPr>
-            </a:pPr>
-            <a:r>
-              <a:t>答辩展示时优先说明指标口径，再解释数值；避免把不同 score 横向误比。</a:t>
-            </a:r>
-          </a:p>
-          <a:p>
-            <a:pPr>
-              <a:spcAft>
-                <a:spcPts val="800"/>
-              </a:spcAft>
-              <a:defRPr sz="1600">
-                <a:solidFill>
-                  <a:srgbClr val="111827"/>
-                </a:solidFill>
-                <a:latin typeface="PingFang SC"/>
-              </a:defRPr>
-            </a:pPr>
-            <a:r>
-              <a:t>96 快照抽样复现的主要价值是工程闭环、指标口径和 gap 表可复查，不把结果包装成作者全量训练。</a:t>
+              <a:t>外部 SOTA 未重跑；tsfresh 相关性整体偏弱；RULSurv held-out pass 是 0.25 survival probability 的项目迁移策略。</a:t>
             </a:r>
           </a:p>
         </p:txBody>
@@ -4175,7 +4528,7 @@
                 </a:solidFill>
                 <a:latin typeface="PingFang SC"/>
               </a:rPr>
-              <a:t>测试验收：用证据说话</a:t>
+              <a:t>评价指标：不混淆 Score 口径</a:t>
             </a:r>
           </a:p>
         </p:txBody>
@@ -4335,14 +4688,14 @@
         </p:nvSpPr>
         <p:spPr>
           <a:xfrm>
-            <a:off x="777240" y="960120"/>
-            <a:ext cx="2148840" cy="960120"/>
+            <a:off x="685800" y="960120"/>
+            <a:ext cx="3337560" cy="1737360"/>
           </a:xfrm>
           <a:prstGeom prst="roundRect">
             <a:avLst/>
           </a:prstGeom>
           <a:solidFill>
-            <a:srgbClr val="FFFFFF"/>
+            <a:srgbClr val="EFF6FF"/>
           </a:solidFill>
           <a:ln>
             <a:solidFill>
@@ -4374,36 +4727,44 @@
       </p:sp>
       <p:sp>
         <p:nvSpPr>
-          <p:cNvPr id="9" name="TextBox 8"/>
-          <p:cNvSpPr txBox="1"/>
-          <p:nvPr/>
-        </p:nvSpPr>
-        <p:spPr>
-          <a:xfrm>
-            <a:off x="914400" y="1124712"/>
-            <a:ext cx="1874519" cy="292608"/>
-          </a:xfrm>
-          <a:prstGeom prst="rect">
-            <a:avLst/>
-          </a:prstGeom>
-          <a:noFill/>
-        </p:spPr>
-        <p:txBody>
-          <a:bodyPr wrap="square">
-            <a:spAutoFit/>
-          </a:bodyPr>
+          <p:cNvPr id="9" name="Rectangle 8"/>
+          <p:cNvSpPr/>
+          <p:nvPr/>
+        </p:nvSpPr>
+        <p:spPr>
+          <a:xfrm>
+            <a:off x="685800" y="960120"/>
+            <a:ext cx="91440" cy="1737360"/>
+          </a:xfrm>
+          <a:prstGeom prst="rect">
+            <a:avLst/>
+          </a:prstGeom>
+          <a:solidFill>
+            <a:srgbClr val="2563EB"/>
+          </a:solidFill>
+          <a:ln>
+            <a:noFill/>
+          </a:ln>
+        </p:spPr>
+        <p:style>
+          <a:lnRef idx="1">
+            <a:schemeClr val="accent1"/>
+          </a:lnRef>
+          <a:fillRef idx="3">
+            <a:schemeClr val="accent1"/>
+          </a:fillRef>
+          <a:effectRef idx="2">
+            <a:schemeClr val="accent1"/>
+          </a:effectRef>
+          <a:fontRef idx="minor">
+            <a:schemeClr val="lt1"/>
+          </a:fontRef>
+        </p:style>
+        <p:txBody>
+          <a:bodyPr rtlCol="0" anchor="ctr"/>
           <a:lstStyle/>
           <a:p>
             <a:pPr algn="ctr"/>
-            <a:r>
-              <a:rPr sz="2200" b="1">
-                <a:solidFill>
-                  <a:srgbClr val="16A34A"/>
-                </a:solidFill>
-                <a:latin typeface="PingFang SC"/>
-              </a:rPr>
-              <a:t>39</a:t>
-            </a:r>
           </a:p>
         </p:txBody>
       </p:sp>
@@ -4415,49 +4776,82 @@
         </p:nvSpPr>
         <p:spPr>
           <a:xfrm>
-            <a:off x="914400" y="1527048"/>
-            <a:ext cx="1874519" cy="201168"/>
-          </a:xfrm>
-          <a:prstGeom prst="rect">
-            <a:avLst/>
-          </a:prstGeom>
-          <a:noFill/>
-        </p:spPr>
-        <p:txBody>
-          <a:bodyPr wrap="square">
-            <a:spAutoFit/>
-          </a:bodyPr>
-          <a:lstStyle/>
-          <a:p>
-            <a:pPr algn="ctr"/>
-            <a:r>
-              <a:rPr sz="1000" b="0">
-                <a:solidFill>
-                  <a:srgbClr val="64748B"/>
-                </a:solidFill>
-                <a:latin typeface="PingFang SC"/>
-              </a:rPr>
-              <a:t>pytest 全量通过</a:t>
-            </a:r>
-          </a:p>
-        </p:txBody>
-      </p:sp>
-      <p:sp>
-        <p:nvSpPr>
-          <p:cNvPr id="11" name="Rounded Rectangle 10"/>
+            <a:off x="886968" y="1078992"/>
+            <a:ext cx="3026664" cy="256032"/>
+          </a:xfrm>
+          <a:prstGeom prst="rect">
+            <a:avLst/>
+          </a:prstGeom>
+          <a:noFill/>
+        </p:spPr>
+        <p:txBody>
+          <a:bodyPr wrap="square">
+            <a:spAutoFit/>
+          </a:bodyPr>
+          <a:lstStyle/>
+          <a:p>
+            <a:r>
+              <a:rPr sz="1600" b="1">
+                <a:solidFill>
+                  <a:srgbClr val="2563EB"/>
+                </a:solidFill>
+                <a:latin typeface="PingFang SC"/>
+              </a:rPr>
+              <a:t>普通误差</a:t>
+            </a:r>
+          </a:p>
+        </p:txBody>
+      </p:sp>
+      <p:sp>
+        <p:nvSpPr>
+          <p:cNvPr id="11" name="TextBox 10"/>
+          <p:cNvSpPr txBox="1"/>
+          <p:nvPr/>
+        </p:nvSpPr>
+        <p:spPr>
+          <a:xfrm>
+            <a:off x="886968" y="1399032"/>
+            <a:ext cx="3008376" cy="1225295"/>
+          </a:xfrm>
+          <a:prstGeom prst="rect">
+            <a:avLst/>
+          </a:prstGeom>
+          <a:noFill/>
+        </p:spPr>
+        <p:txBody>
+          <a:bodyPr wrap="square">
+            <a:spAutoFit/>
+          </a:bodyPr>
+          <a:lstStyle/>
+          <a:p>
+            <a:r>
+              <a:rPr sz="1200" b="0">
+                <a:solidFill>
+                  <a:srgbClr val="111827"/>
+                </a:solidFill>
+                <a:latin typeface="PingFang SC"/>
+              </a:rPr>
+              <a:t>MAE、RMSE、NormalizedRMSE、SMAPE、R2：回答预测偏差有多大。</a:t>
+            </a:r>
+          </a:p>
+        </p:txBody>
+      </p:sp>
+      <p:sp>
+        <p:nvSpPr>
+          <p:cNvPr id="12" name="Rounded Rectangle 11"/>
           <p:cNvSpPr/>
           <p:nvPr/>
         </p:nvSpPr>
         <p:spPr>
           <a:xfrm>
-            <a:off x="3154680" y="960120"/>
-            <a:ext cx="2148840" cy="960120"/>
+            <a:off x="4389120" y="960120"/>
+            <a:ext cx="3337560" cy="1737360"/>
           </a:xfrm>
           <a:prstGeom prst="roundRect">
             <a:avLst/>
           </a:prstGeom>
           <a:solidFill>
-            <a:srgbClr val="FFFFFF"/>
+            <a:srgbClr val="F0FDF4"/>
           </a:solidFill>
           <a:ln>
             <a:solidFill>
@@ -4489,90 +4883,131 @@
       </p:sp>
       <p:sp>
         <p:nvSpPr>
-          <p:cNvPr id="12" name="TextBox 11"/>
-          <p:cNvSpPr txBox="1"/>
-          <p:nvPr/>
-        </p:nvSpPr>
-        <p:spPr>
-          <a:xfrm>
-            <a:off x="3291840" y="1124712"/>
-            <a:ext cx="1874519" cy="292608"/>
-          </a:xfrm>
-          <a:prstGeom prst="rect">
-            <a:avLst/>
-          </a:prstGeom>
-          <a:noFill/>
-        </p:spPr>
-        <p:txBody>
-          <a:bodyPr wrap="square">
-            <a:spAutoFit/>
-          </a:bodyPr>
+          <p:cNvPr id="13" name="Rectangle 12"/>
+          <p:cNvSpPr/>
+          <p:nvPr/>
+        </p:nvSpPr>
+        <p:spPr>
+          <a:xfrm>
+            <a:off x="4389120" y="960120"/>
+            <a:ext cx="91440" cy="1737360"/>
+          </a:xfrm>
+          <a:prstGeom prst="rect">
+            <a:avLst/>
+          </a:prstGeom>
+          <a:solidFill>
+            <a:srgbClr val="16A34A"/>
+          </a:solidFill>
+          <a:ln>
+            <a:noFill/>
+          </a:ln>
+        </p:spPr>
+        <p:style>
+          <a:lnRef idx="1">
+            <a:schemeClr val="accent1"/>
+          </a:lnRef>
+          <a:fillRef idx="3">
+            <a:schemeClr val="accent1"/>
+          </a:fillRef>
+          <a:effectRef idx="2">
+            <a:schemeClr val="accent1"/>
+          </a:effectRef>
+          <a:fontRef idx="minor">
+            <a:schemeClr val="lt1"/>
+          </a:fontRef>
+        </p:style>
+        <p:txBody>
+          <a:bodyPr rtlCol="0" anchor="ctr"/>
           <a:lstStyle/>
           <a:p>
             <a:pPr algn="ctr"/>
-            <a:r>
-              <a:rPr sz="2200" b="1">
-                <a:solidFill>
-                  <a:srgbClr val="2563EB"/>
-                </a:solidFill>
-                <a:latin typeface="PingFang SC"/>
-              </a:rPr>
-              <a:t>20</a:t>
-            </a:r>
-          </a:p>
-        </p:txBody>
-      </p:sp>
-      <p:sp>
-        <p:nvSpPr>
-          <p:cNvPr id="13" name="TextBox 12"/>
-          <p:cNvSpPr txBox="1"/>
-          <p:nvPr/>
-        </p:nvSpPr>
-        <p:spPr>
-          <a:xfrm>
-            <a:off x="3291840" y="1527048"/>
-            <a:ext cx="1874519" cy="201168"/>
-          </a:xfrm>
-          <a:prstGeom prst="rect">
-            <a:avLst/>
-          </a:prstGeom>
-          <a:noFill/>
-        </p:spPr>
-        <p:txBody>
-          <a:bodyPr wrap="square">
-            <a:spAutoFit/>
-          </a:bodyPr>
-          <a:lstStyle/>
-          <a:p>
-            <a:pPr algn="ctr"/>
-            <a:r>
-              <a:rPr sz="1000" b="0">
-                <a:solidFill>
-                  <a:srgbClr val="64748B"/>
-                </a:solidFill>
-                <a:latin typeface="PingFang SC"/>
-              </a:rPr>
-              <a:t>论文与 notebook focused</a:t>
-            </a:r>
-          </a:p>
-        </p:txBody>
-      </p:sp>
-      <p:sp>
-        <p:nvSpPr>
-          <p:cNvPr id="14" name="Rounded Rectangle 13"/>
+          </a:p>
+        </p:txBody>
+      </p:sp>
+      <p:sp>
+        <p:nvSpPr>
+          <p:cNvPr id="14" name="TextBox 13"/>
+          <p:cNvSpPr txBox="1"/>
+          <p:nvPr/>
+        </p:nvSpPr>
+        <p:spPr>
+          <a:xfrm>
+            <a:off x="4590288" y="1078992"/>
+            <a:ext cx="3026664" cy="256032"/>
+          </a:xfrm>
+          <a:prstGeom prst="rect">
+            <a:avLst/>
+          </a:prstGeom>
+          <a:noFill/>
+        </p:spPr>
+        <p:txBody>
+          <a:bodyPr wrap="square">
+            <a:spAutoFit/>
+          </a:bodyPr>
+          <a:lstStyle/>
+          <a:p>
+            <a:r>
+              <a:rPr sz="1600" b="1">
+                <a:solidFill>
+                  <a:srgbClr val="16A34A"/>
+                </a:solidFill>
+                <a:latin typeface="PingFang SC"/>
+              </a:rPr>
+              <a:t>论文 Score</a:t>
+            </a:r>
+          </a:p>
+        </p:txBody>
+      </p:sp>
+      <p:sp>
+        <p:nvSpPr>
+          <p:cNvPr id="15" name="TextBox 14"/>
+          <p:cNvSpPr txBox="1"/>
+          <p:nvPr/>
+        </p:nvSpPr>
+        <p:spPr>
+          <a:xfrm>
+            <a:off x="4590288" y="1399032"/>
+            <a:ext cx="3008376" cy="1225295"/>
+          </a:xfrm>
+          <a:prstGeom prst="rect">
+            <a:avLst/>
+          </a:prstGeom>
+          <a:noFill/>
+        </p:spPr>
+        <p:txBody>
+          <a:bodyPr wrap="square">
+            <a:spAutoFit/>
+          </a:bodyPr>
+          <a:lstStyle/>
+          <a:p>
+            <a:r>
+              <a:rPr sz="1200" b="0">
+                <a:solidFill>
+                  <a:srgbClr val="111827"/>
+                </a:solidFill>
+                <a:latin typeface="PingFang SC"/>
+              </a:rPr>
+              <a:t>HuangRulScore 按 Er_i = 100*(target-prediction)/target 分段指数公式。</a:t>
+            </a:r>
+          </a:p>
+        </p:txBody>
+      </p:sp>
+      <p:sp>
+        <p:nvSpPr>
+          <p:cNvPr id="16" name="Rounded Rectangle 15"/>
           <p:cNvSpPr/>
           <p:nvPr/>
         </p:nvSpPr>
         <p:spPr>
           <a:xfrm>
-            <a:off x="5532120" y="960120"/>
-            <a:ext cx="2148840" cy="960120"/>
+            <a:off x="8092440" y="960120"/>
+            <a:ext cx="3337560" cy="1737360"/>
           </a:xfrm>
           <a:prstGeom prst="roundRect">
             <a:avLst/>
           </a:prstGeom>
           <a:solidFill>
-            <a:srgbClr val="FFFFFF"/>
+            <a:srgbClr val="FFF7ED"/>
           </a:solidFill>
           <a:ln>
             <a:solidFill>
@@ -4604,95 +5039,23 @@
       </p:sp>
       <p:sp>
         <p:nvSpPr>
-          <p:cNvPr id="15" name="TextBox 14"/>
-          <p:cNvSpPr txBox="1"/>
-          <p:nvPr/>
-        </p:nvSpPr>
-        <p:spPr>
-          <a:xfrm>
-            <a:off x="5669280" y="1124712"/>
-            <a:ext cx="1874519" cy="292608"/>
-          </a:xfrm>
-          <a:prstGeom prst="rect">
-            <a:avLst/>
-          </a:prstGeom>
-          <a:noFill/>
-        </p:spPr>
-        <p:txBody>
-          <a:bodyPr wrap="square">
-            <a:spAutoFit/>
-          </a:bodyPr>
-          <a:lstStyle/>
-          <a:p>
-            <a:pPr algn="ctr"/>
-            <a:r>
-              <a:rPr sz="2200" b="1">
-                <a:solidFill>
-                  <a:srgbClr val="F97316"/>
-                </a:solidFill>
-                <a:latin typeface="PingFang SC"/>
-              </a:rPr>
-              <a:t>18</a:t>
-            </a:r>
-          </a:p>
-        </p:txBody>
-      </p:sp>
-      <p:sp>
-        <p:nvSpPr>
-          <p:cNvPr id="16" name="TextBox 15"/>
-          <p:cNvSpPr txBox="1"/>
-          <p:nvPr/>
-        </p:nvSpPr>
-        <p:spPr>
-          <a:xfrm>
-            <a:off x="5669280" y="1527048"/>
-            <a:ext cx="1874519" cy="201168"/>
-          </a:xfrm>
-          <a:prstGeom prst="rect">
-            <a:avLst/>
-          </a:prstGeom>
-          <a:noFill/>
-        </p:spPr>
-        <p:txBody>
-          <a:bodyPr wrap="square">
-            <a:spAutoFit/>
-          </a:bodyPr>
-          <a:lstStyle/>
-          <a:p>
-            <a:pPr algn="ctr"/>
-            <a:r>
-              <a:rPr sz="1000" b="0">
-                <a:solidFill>
-                  <a:srgbClr val="64748B"/>
-                </a:solidFill>
-                <a:latin typeface="PingFang SC"/>
-              </a:rPr>
-              <a:t>xLSTM 真实训练结果行</a:t>
-            </a:r>
-          </a:p>
-        </p:txBody>
-      </p:sp>
-      <p:sp>
-        <p:nvSpPr>
-          <p:cNvPr id="17" name="Rounded Rectangle 16"/>
+          <p:cNvPr id="17" name="Rectangle 16"/>
           <p:cNvSpPr/>
           <p:nvPr/>
         </p:nvSpPr>
         <p:spPr>
           <a:xfrm>
-            <a:off x="7909560" y="960120"/>
-            <a:ext cx="2148840" cy="960120"/>
-          </a:xfrm>
-          <a:prstGeom prst="roundRect">
+            <a:off x="8092440" y="960120"/>
+            <a:ext cx="91440" cy="1737360"/>
+          </a:xfrm>
+          <a:prstGeom prst="rect">
             <a:avLst/>
           </a:prstGeom>
           <a:solidFill>
-            <a:srgbClr val="FFFFFF"/>
+            <a:srgbClr val="F97316"/>
           </a:solidFill>
           <a:ln>
-            <a:solidFill>
-              <a:srgbClr val="E2E8F0"/>
-            </a:solidFill>
+            <a:noFill/>
           </a:ln>
         </p:spPr>
         <p:style>
@@ -4725,29 +5088,28 @@
         </p:nvSpPr>
         <p:spPr>
           <a:xfrm>
-            <a:off x="8046720" y="1124712"/>
-            <a:ext cx="1874519" cy="292608"/>
-          </a:xfrm>
-          <a:prstGeom prst="rect">
-            <a:avLst/>
-          </a:prstGeom>
-          <a:noFill/>
-        </p:spPr>
-        <p:txBody>
-          <a:bodyPr wrap="square">
-            <a:spAutoFit/>
-          </a:bodyPr>
-          <a:lstStyle/>
-          <a:p>
-            <a:pPr algn="ctr"/>
-            <a:r>
-              <a:rPr sz="2200" b="1">
-                <a:solidFill>
-                  <a:srgbClr val="7C3AED"/>
-                </a:solidFill>
-                <a:latin typeface="PingFang SC"/>
-              </a:rPr>
-              <a:t>50</a:t>
+            <a:off x="8293608" y="1078992"/>
+            <a:ext cx="3026664" cy="256032"/>
+          </a:xfrm>
+          <a:prstGeom prst="rect">
+            <a:avLst/>
+          </a:prstGeom>
+          <a:noFill/>
+        </p:spPr>
+        <p:txBody>
+          <a:bodyPr wrap="square">
+            <a:spAutoFit/>
+          </a:bodyPr>
+          <a:lstStyle/>
+          <a:p>
+            <a:r>
+              <a:rPr sz="1600" b="1">
+                <a:solidFill>
+                  <a:srgbClr val="F97316"/>
+                </a:solidFill>
+                <a:latin typeface="PingFang SC"/>
+              </a:rPr>
+              <a:t>解释性指标</a:t>
             </a:r>
           </a:p>
         </p:txBody>
@@ -4760,29 +5122,28 @@
         </p:nvSpPr>
         <p:spPr>
           <a:xfrm>
-            <a:off x="8046720" y="1527048"/>
-            <a:ext cx="1874519" cy="201168"/>
-          </a:xfrm>
-          <a:prstGeom prst="rect">
-            <a:avLst/>
-          </a:prstGeom>
-          <a:noFill/>
-        </p:spPr>
-        <p:txBody>
-          <a:bodyPr wrap="square">
-            <a:spAutoFit/>
-          </a:bodyPr>
-          <a:lstStyle/>
-          <a:p>
-            <a:pPr algn="ctr"/>
-            <a:r>
-              <a:rPr sz="1000" b="0">
-                <a:solidFill>
-                  <a:srgbClr val="64748B"/>
-                </a:solidFill>
-                <a:latin typeface="PingFang SC"/>
-              </a:rPr>
-              <a:t>正式训练 epoch</a:t>
+            <a:off x="8293608" y="1399032"/>
+            <a:ext cx="3008376" cy="1225295"/>
+          </a:xfrm>
+          <a:prstGeom prst="rect">
+            <a:avLst/>
+          </a:prstGeom>
+          <a:noFill/>
+        </p:spPr>
+        <p:txBody>
+          <a:bodyPr wrap="square">
+            <a:spAutoFit/>
+          </a:bodyPr>
+          <a:lstStyle/>
+          <a:p>
+            <a:r>
+              <a:rPr sz="1200" b="0">
+                <a:solidFill>
+                  <a:srgbClr val="111827"/>
+                </a:solidFill>
+                <a:latin typeface="PingFang SC"/>
+              </a:rPr>
+              <a:t>Over/UnderPredictionRate、WithinToleranceRate：解释偏早/偏晚预测倾向。</a:t>
             </a:r>
           </a:p>
         </p:txBody>
@@ -4795,7 +5156,7 @@
         </p:nvSpPr>
         <p:spPr>
           <a:xfrm>
-            <a:off x="914400" y="2651760"/>
+            <a:off x="914400" y="3429000"/>
             <a:ext cx="10058400" cy="5212080"/>
           </a:xfrm>
           <a:prstGeom prst="rect">
@@ -4821,7 +5182,7 @@
               </a:defRPr>
             </a:pPr>
             <a:r>
-              <a:t>notebook 测试直接执行 examples/*.ipynb，而非只检查文件存在。</a:t>
+              <a:t>PHM/NASA 类 score 是挑战赛惩罚函数，不等同于 Huang 论文原版 Score。</a:t>
             </a:r>
           </a:p>
           <a:p>
@@ -4837,7 +5198,7 @@
               </a:defRPr>
             </a:pPr>
             <a:r>
-              <a:t>真实训练输出 history.csv、metrics.json、predictions.csv、comparison_metrics.csv。</a:t>
+              <a:t>答辩展示时优先说明指标口径，再解释数值；避免把不同 score 横向误比。</a:t>
             </a:r>
           </a:p>
           <a:p>
@@ -4853,23 +5214,7 @@
               </a:defRPr>
             </a:pPr>
             <a:r>
-              <a:t>tmp/、outputs/、真实数据和模型产物不提交；文档只记录命令和指标摘要。</a:t>
-            </a:r>
-          </a:p>
-          <a:p>
-            <a:pPr>
-              <a:spcAft>
-                <a:spcPts val="800"/>
-              </a:spcAft>
-              <a:defRPr sz="1600">
-                <a:solidFill>
-                  <a:srgbClr val="111827"/>
-                </a:solidFill>
-                <a:latin typeface="PingFang SC"/>
-              </a:defRPr>
-            </a:pPr>
-            <a:r>
-              <a:t>四轮提交保存阶段成果，远端 main 已推送，便于回溯。</a:t>
+              <a:t>96 快照抽样复现的主要价值是工程闭环、指标口径和 gap 表可复查，不把结果包装成作者全量训练。</a:t>
             </a:r>
           </a:p>
         </p:txBody>
@@ -4972,7 +5317,7 @@
                 </a:solidFill>
                 <a:latin typeface="PingFang SC"/>
               </a:rPr>
-              <a:t>结项交付物</a:t>
+              <a:t>测试验收：用证据说话</a:t>
             </a:r>
           </a:p>
         </p:txBody>
@@ -5126,163 +5471,16 @@
       </p:sp>
       <p:sp>
         <p:nvSpPr>
-          <p:cNvPr id="8" name="Rectangle 7"/>
+          <p:cNvPr id="8" name="Rounded Rectangle 7"/>
           <p:cNvSpPr/>
           <p:nvPr/>
         </p:nvSpPr>
         <p:spPr>
           <a:xfrm>
-            <a:off x="685800" y="987552"/>
-            <a:ext cx="10789920" cy="457200"/>
-          </a:xfrm>
-          <a:prstGeom prst="rect">
-            <a:avLst/>
-          </a:prstGeom>
-          <a:solidFill>
-            <a:srgbClr val="EFF6FF"/>
-          </a:solidFill>
-          <a:ln>
-            <a:solidFill>
-              <a:srgbClr val="E2E8F0"/>
-            </a:solidFill>
-          </a:ln>
-        </p:spPr>
-        <p:style>
-          <a:lnRef idx="1">
-            <a:schemeClr val="accent1"/>
-          </a:lnRef>
-          <a:fillRef idx="3">
-            <a:schemeClr val="accent1"/>
-          </a:fillRef>
-          <a:effectRef idx="2">
-            <a:schemeClr val="accent1"/>
-          </a:effectRef>
-          <a:fontRef idx="minor">
-            <a:schemeClr val="lt1"/>
-          </a:fontRef>
-        </p:style>
-        <p:txBody>
-          <a:bodyPr rtlCol="0" anchor="ctr"/>
-          <a:lstStyle/>
-          <a:p>
-            <a:pPr algn="ctr"/>
-          </a:p>
-        </p:txBody>
-      </p:sp>
-      <p:sp>
-        <p:nvSpPr>
-          <p:cNvPr id="9" name="TextBox 8"/>
-          <p:cNvSpPr txBox="1"/>
-          <p:nvPr/>
-        </p:nvSpPr>
-        <p:spPr>
-          <a:xfrm>
-            <a:off x="822960" y="1088136"/>
-            <a:ext cx="2514600" cy="182880"/>
-          </a:xfrm>
-          <a:prstGeom prst="rect">
-            <a:avLst/>
-          </a:prstGeom>
-          <a:noFill/>
-        </p:spPr>
-        <p:txBody>
-          <a:bodyPr wrap="square">
-            <a:spAutoFit/>
-          </a:bodyPr>
-          <a:lstStyle/>
-          <a:p>
-            <a:r>
-              <a:rPr sz="1200" b="1">
-                <a:solidFill>
-                  <a:srgbClr val="111827"/>
-                </a:solidFill>
-                <a:latin typeface="PingFang SC"/>
-              </a:rPr>
-              <a:t>源码</a:t>
-            </a:r>
-          </a:p>
-        </p:txBody>
-      </p:sp>
-      <p:sp>
-        <p:nvSpPr>
-          <p:cNvPr id="10" name="TextBox 9"/>
-          <p:cNvSpPr txBox="1"/>
-          <p:nvPr/>
-        </p:nvSpPr>
-        <p:spPr>
-          <a:xfrm>
-            <a:off x="3520440" y="1088136"/>
-            <a:ext cx="3749039" cy="182880"/>
-          </a:xfrm>
-          <a:prstGeom prst="rect">
-            <a:avLst/>
-          </a:prstGeom>
-          <a:noFill/>
-        </p:spPr>
-        <p:txBody>
-          <a:bodyPr wrap="square">
-            <a:spAutoFit/>
-          </a:bodyPr>
-          <a:lstStyle/>
-          <a:p>
-            <a:r>
-              <a:rPr sz="1200" b="0">
-                <a:solidFill>
-                  <a:srgbClr val="111827"/>
-                </a:solidFill>
-                <a:latin typeface="PingFang SC"/>
-              </a:rPr>
-              <a:t>src/USTC/SSE/BearingPrediction</a:t>
-            </a:r>
-          </a:p>
-        </p:txBody>
-      </p:sp>
-      <p:sp>
-        <p:nvSpPr>
-          <p:cNvPr id="11" name="TextBox 10"/>
-          <p:cNvSpPr txBox="1"/>
-          <p:nvPr/>
-        </p:nvSpPr>
-        <p:spPr>
-          <a:xfrm>
-            <a:off x="7498079" y="1088136"/>
-            <a:ext cx="3657600" cy="182880"/>
-          </a:xfrm>
-          <a:prstGeom prst="rect">
-            <a:avLst/>
-          </a:prstGeom>
-          <a:noFill/>
-        </p:spPr>
-        <p:txBody>
-          <a:bodyPr wrap="square">
-            <a:spAutoFit/>
-          </a:bodyPr>
-          <a:lstStyle/>
-          <a:p>
-            <a:r>
-              <a:rPr sz="1200" b="0">
-                <a:solidFill>
-                  <a:srgbClr val="475569"/>
-                </a:solidFill>
-                <a:latin typeface="PingFang SC"/>
-              </a:rPr>
-              <a:t>数据、模型、训练、评估模块</a:t>
-            </a:r>
-          </a:p>
-        </p:txBody>
-      </p:sp>
-      <p:sp>
-        <p:nvSpPr>
-          <p:cNvPr id="12" name="Rectangle 11"/>
-          <p:cNvSpPr/>
-          <p:nvPr/>
-        </p:nvSpPr>
-        <p:spPr>
-          <a:xfrm>
-            <a:off x="685800" y="1481328"/>
-            <a:ext cx="10789920" cy="457200"/>
-          </a:xfrm>
-          <a:prstGeom prst="rect">
+            <a:off x="777240" y="960120"/>
+            <a:ext cx="2148840" cy="960120"/>
+          </a:xfrm>
+          <a:prstGeom prst="roundRect">
             <a:avLst/>
           </a:prstGeom>
           <a:solidFill>
@@ -5318,265 +5516,86 @@
       </p:sp>
       <p:sp>
         <p:nvSpPr>
-          <p:cNvPr id="13" name="TextBox 12"/>
-          <p:cNvSpPr txBox="1"/>
-          <p:nvPr/>
-        </p:nvSpPr>
-        <p:spPr>
-          <a:xfrm>
-            <a:off x="822960" y="1581912"/>
-            <a:ext cx="2514600" cy="182880"/>
-          </a:xfrm>
-          <a:prstGeom prst="rect">
-            <a:avLst/>
-          </a:prstGeom>
-          <a:noFill/>
-        </p:spPr>
-        <p:txBody>
-          <a:bodyPr wrap="square">
-            <a:spAutoFit/>
-          </a:bodyPr>
-          <a:lstStyle/>
-          <a:p>
-            <a:r>
-              <a:rPr sz="1200" b="1">
-                <a:solidFill>
-                  <a:srgbClr val="111827"/>
-                </a:solidFill>
-                <a:latin typeface="PingFang SC"/>
-              </a:rPr>
-              <a:t>示例</a:t>
-            </a:r>
-          </a:p>
-        </p:txBody>
-      </p:sp>
-      <p:sp>
-        <p:nvSpPr>
-          <p:cNvPr id="14" name="TextBox 13"/>
-          <p:cNvSpPr txBox="1"/>
-          <p:nvPr/>
-        </p:nvSpPr>
-        <p:spPr>
-          <a:xfrm>
-            <a:off x="3520440" y="1581912"/>
-            <a:ext cx="3749039" cy="182880"/>
-          </a:xfrm>
-          <a:prstGeom prst="rect">
-            <a:avLst/>
-          </a:prstGeom>
-          <a:noFill/>
-        </p:spPr>
-        <p:txBody>
-          <a:bodyPr wrap="square">
-            <a:spAutoFit/>
-          </a:bodyPr>
-          <a:lstStyle/>
-          <a:p>
-            <a:r>
-              <a:rPr sz="1200" b="0">
-                <a:solidFill>
-                  <a:srgbClr val="111827"/>
-                </a:solidFill>
-                <a:latin typeface="PingFang SC"/>
-              </a:rPr>
-              <a:t>examples/00-07 notebooks</a:t>
-            </a:r>
-          </a:p>
-        </p:txBody>
-      </p:sp>
-      <p:sp>
-        <p:nvSpPr>
-          <p:cNvPr id="15" name="TextBox 14"/>
-          <p:cNvSpPr txBox="1"/>
-          <p:nvPr/>
-        </p:nvSpPr>
-        <p:spPr>
-          <a:xfrm>
-            <a:off x="7498079" y="1581912"/>
-            <a:ext cx="3657600" cy="182880"/>
-          </a:xfrm>
-          <a:prstGeom prst="rect">
-            <a:avLst/>
-          </a:prstGeom>
-          <a:noFill/>
-        </p:spPr>
-        <p:txBody>
-          <a:bodyPr wrap="square">
-            <a:spAutoFit/>
-          </a:bodyPr>
-          <a:lstStyle/>
-          <a:p>
-            <a:r>
-              <a:rPr sz="1200" b="0">
-                <a:solidFill>
-                  <a:srgbClr val="475569"/>
-                </a:solidFill>
-                <a:latin typeface="PingFang SC"/>
-              </a:rPr>
-              <a:t>全部可执行</a:t>
-            </a:r>
-          </a:p>
-        </p:txBody>
-      </p:sp>
-      <p:sp>
-        <p:nvSpPr>
-          <p:cNvPr id="16" name="Rectangle 15"/>
+          <p:cNvPr id="9" name="TextBox 8"/>
+          <p:cNvSpPr txBox="1"/>
+          <p:nvPr/>
+        </p:nvSpPr>
+        <p:spPr>
+          <a:xfrm>
+            <a:off x="914400" y="1124712"/>
+            <a:ext cx="1874519" cy="292608"/>
+          </a:xfrm>
+          <a:prstGeom prst="rect">
+            <a:avLst/>
+          </a:prstGeom>
+          <a:noFill/>
+        </p:spPr>
+        <p:txBody>
+          <a:bodyPr wrap="square">
+            <a:spAutoFit/>
+          </a:bodyPr>
+          <a:lstStyle/>
+          <a:p>
+            <a:pPr algn="ctr"/>
+            <a:r>
+              <a:rPr sz="2200" b="1">
+                <a:solidFill>
+                  <a:srgbClr val="16A34A"/>
+                </a:solidFill>
+                <a:latin typeface="PingFang SC"/>
+              </a:rPr>
+              <a:t>59</a:t>
+            </a:r>
+          </a:p>
+        </p:txBody>
+      </p:sp>
+      <p:sp>
+        <p:nvSpPr>
+          <p:cNvPr id="10" name="TextBox 9"/>
+          <p:cNvSpPr txBox="1"/>
+          <p:nvPr/>
+        </p:nvSpPr>
+        <p:spPr>
+          <a:xfrm>
+            <a:off x="914400" y="1527048"/>
+            <a:ext cx="1874519" cy="201168"/>
+          </a:xfrm>
+          <a:prstGeom prst="rect">
+            <a:avLst/>
+          </a:prstGeom>
+          <a:noFill/>
+        </p:spPr>
+        <p:txBody>
+          <a:bodyPr wrap="square">
+            <a:spAutoFit/>
+          </a:bodyPr>
+          <a:lstStyle/>
+          <a:p>
+            <a:pPr algn="ctr"/>
+            <a:r>
+              <a:rPr sz="1000" b="0">
+                <a:solidFill>
+                  <a:srgbClr val="64748B"/>
+                </a:solidFill>
+                <a:latin typeface="PingFang SC"/>
+              </a:rPr>
+              <a:t>pytest 全量通过</a:t>
+            </a:r>
+          </a:p>
+        </p:txBody>
+      </p:sp>
+      <p:sp>
+        <p:nvSpPr>
+          <p:cNvPr id="11" name="Rounded Rectangle 10"/>
           <p:cNvSpPr/>
           <p:nvPr/>
         </p:nvSpPr>
         <p:spPr>
           <a:xfrm>
-            <a:off x="685800" y="1975104"/>
-            <a:ext cx="10789920" cy="457200"/>
-          </a:xfrm>
-          <a:prstGeom prst="rect">
-            <a:avLst/>
-          </a:prstGeom>
-          <a:solidFill>
-            <a:srgbClr val="EFF6FF"/>
-          </a:solidFill>
-          <a:ln>
-            <a:solidFill>
-              <a:srgbClr val="E2E8F0"/>
-            </a:solidFill>
-          </a:ln>
-        </p:spPr>
-        <p:style>
-          <a:lnRef idx="1">
-            <a:schemeClr val="accent1"/>
-          </a:lnRef>
-          <a:fillRef idx="3">
-            <a:schemeClr val="accent1"/>
-          </a:fillRef>
-          <a:effectRef idx="2">
-            <a:schemeClr val="accent1"/>
-          </a:effectRef>
-          <a:fontRef idx="minor">
-            <a:schemeClr val="lt1"/>
-          </a:fontRef>
-        </p:style>
-        <p:txBody>
-          <a:bodyPr rtlCol="0" anchor="ctr"/>
-          <a:lstStyle/>
-          <a:p>
-            <a:pPr algn="ctr"/>
-          </a:p>
-        </p:txBody>
-      </p:sp>
-      <p:sp>
-        <p:nvSpPr>
-          <p:cNvPr id="17" name="TextBox 16"/>
-          <p:cNvSpPr txBox="1"/>
-          <p:nvPr/>
-        </p:nvSpPr>
-        <p:spPr>
-          <a:xfrm>
-            <a:off x="822960" y="2075688"/>
-            <a:ext cx="2514600" cy="182880"/>
-          </a:xfrm>
-          <a:prstGeom prst="rect">
-            <a:avLst/>
-          </a:prstGeom>
-          <a:noFill/>
-        </p:spPr>
-        <p:txBody>
-          <a:bodyPr wrap="square">
-            <a:spAutoFit/>
-          </a:bodyPr>
-          <a:lstStyle/>
-          <a:p>
-            <a:r>
-              <a:rPr sz="1200" b="1">
-                <a:solidFill>
-                  <a:srgbClr val="111827"/>
-                </a:solidFill>
-                <a:latin typeface="PingFang SC"/>
-              </a:rPr>
-              <a:t>复现文档</a:t>
-            </a:r>
-          </a:p>
-        </p:txBody>
-      </p:sp>
-      <p:sp>
-        <p:nvSpPr>
-          <p:cNvPr id="18" name="TextBox 17"/>
-          <p:cNvSpPr txBox="1"/>
-          <p:nvPr/>
-        </p:nvSpPr>
-        <p:spPr>
-          <a:xfrm>
-            <a:off x="3520440" y="2075688"/>
-            <a:ext cx="3749039" cy="182880"/>
-          </a:xfrm>
-          <a:prstGeom prst="rect">
-            <a:avLst/>
-          </a:prstGeom>
-          <a:noFill/>
-        </p:spPr>
-        <p:txBody>
-          <a:bodyPr wrap="square">
-            <a:spAutoFit/>
-          </a:bodyPr>
-          <a:lstStyle/>
-          <a:p>
-            <a:r>
-              <a:rPr sz="1200" b="0">
-                <a:solidFill>
-                  <a:srgbClr val="111827"/>
-                </a:solidFill>
-                <a:latin typeface="PingFang SC"/>
-              </a:rPr>
-              <a:t>docs/PAPER_REPRODUCTION.md</a:t>
-            </a:r>
-          </a:p>
-        </p:txBody>
-      </p:sp>
-      <p:sp>
-        <p:nvSpPr>
-          <p:cNvPr id="19" name="TextBox 18"/>
-          <p:cNvSpPr txBox="1"/>
-          <p:nvPr/>
-        </p:nvSpPr>
-        <p:spPr>
-          <a:xfrm>
-            <a:off x="7498079" y="2075688"/>
-            <a:ext cx="3657600" cy="182880"/>
-          </a:xfrm>
-          <a:prstGeom prst="rect">
-            <a:avLst/>
-          </a:prstGeom>
-          <a:noFill/>
-        </p:spPr>
-        <p:txBody>
-          <a:bodyPr wrap="square">
-            <a:spAutoFit/>
-          </a:bodyPr>
-          <a:lstStyle/>
-          <a:p>
-            <a:r>
-              <a:rPr sz="1200" b="0">
-                <a:solidFill>
-                  <a:srgbClr val="475569"/>
-                </a:solidFill>
-                <a:latin typeface="PingFang SC"/>
-              </a:rPr>
-              <a:t>两篇论文、命令、指标、边界</a:t>
-            </a:r>
-          </a:p>
-        </p:txBody>
-      </p:sp>
-      <p:sp>
-        <p:nvSpPr>
-          <p:cNvPr id="20" name="Rectangle 19"/>
-          <p:cNvSpPr/>
-          <p:nvPr/>
-        </p:nvSpPr>
-        <p:spPr>
-          <a:xfrm>
-            <a:off x="685800" y="2468880"/>
-            <a:ext cx="10789920" cy="457200"/>
-          </a:xfrm>
-          <a:prstGeom prst="rect">
+            <a:off x="3154680" y="960120"/>
+            <a:ext cx="2148840" cy="960120"/>
+          </a:xfrm>
+          <a:prstGeom prst="roundRect">
             <a:avLst/>
           </a:prstGeom>
           <a:solidFill>
@@ -5612,265 +5631,86 @@
       </p:sp>
       <p:sp>
         <p:nvSpPr>
-          <p:cNvPr id="21" name="TextBox 20"/>
-          <p:cNvSpPr txBox="1"/>
-          <p:nvPr/>
-        </p:nvSpPr>
-        <p:spPr>
-          <a:xfrm>
-            <a:off x="822960" y="2569464"/>
-            <a:ext cx="2514600" cy="182880"/>
-          </a:xfrm>
-          <a:prstGeom prst="rect">
-            <a:avLst/>
-          </a:prstGeom>
-          <a:noFill/>
-        </p:spPr>
-        <p:txBody>
-          <a:bodyPr wrap="square">
-            <a:spAutoFit/>
-          </a:bodyPr>
-          <a:lstStyle/>
-          <a:p>
-            <a:r>
-              <a:rPr sz="1200" b="1">
-                <a:solidFill>
-                  <a:srgbClr val="111827"/>
-                </a:solidFill>
-                <a:latin typeface="PingFang SC"/>
-              </a:rPr>
-              <a:t>课程文档</a:t>
-            </a:r>
-          </a:p>
-        </p:txBody>
-      </p:sp>
-      <p:sp>
-        <p:nvSpPr>
-          <p:cNvPr id="22" name="TextBox 21"/>
-          <p:cNvSpPr txBox="1"/>
-          <p:nvPr/>
-        </p:nvSpPr>
-        <p:spPr>
-          <a:xfrm>
-            <a:off x="3520440" y="2569464"/>
-            <a:ext cx="3749039" cy="182880"/>
-          </a:xfrm>
-          <a:prstGeom prst="rect">
-            <a:avLst/>
-          </a:prstGeom>
-          <a:noFill/>
-        </p:spPr>
-        <p:txBody>
-          <a:bodyPr wrap="square">
-            <a:spAutoFit/>
-          </a:bodyPr>
-          <a:lstStyle/>
-          <a:p>
-            <a:r>
-              <a:rPr sz="1200" b="0">
-                <a:solidFill>
-                  <a:srgbClr val="111827"/>
-                </a:solidFill>
-                <a:latin typeface="PingFang SC"/>
-              </a:rPr>
-              <a:t>proposal / mid-term / final</a:t>
-            </a:r>
-          </a:p>
-        </p:txBody>
-      </p:sp>
-      <p:sp>
-        <p:nvSpPr>
-          <p:cNvPr id="23" name="TextBox 22"/>
-          <p:cNvSpPr txBox="1"/>
-          <p:nvPr/>
-        </p:nvSpPr>
-        <p:spPr>
-          <a:xfrm>
-            <a:off x="7498079" y="2569464"/>
-            <a:ext cx="3657600" cy="182880"/>
-          </a:xfrm>
-          <a:prstGeom prst="rect">
-            <a:avLst/>
-          </a:prstGeom>
-          <a:noFill/>
-        </p:spPr>
-        <p:txBody>
-          <a:bodyPr wrap="square">
-            <a:spAutoFit/>
-          </a:bodyPr>
-          <a:lstStyle/>
-          <a:p>
-            <a:r>
-              <a:rPr sz="1200" b="0">
-                <a:solidFill>
-                  <a:srgbClr val="475569"/>
-                </a:solidFill>
-                <a:latin typeface="PingFang SC"/>
-              </a:rPr>
-              <a:t>开题、中期、结题全套材料</a:t>
-            </a:r>
-          </a:p>
-        </p:txBody>
-      </p:sp>
-      <p:sp>
-        <p:nvSpPr>
-          <p:cNvPr id="24" name="Rectangle 23"/>
+          <p:cNvPr id="12" name="TextBox 11"/>
+          <p:cNvSpPr txBox="1"/>
+          <p:nvPr/>
+        </p:nvSpPr>
+        <p:spPr>
+          <a:xfrm>
+            <a:off x="3291840" y="1124712"/>
+            <a:ext cx="1874519" cy="292608"/>
+          </a:xfrm>
+          <a:prstGeom prst="rect">
+            <a:avLst/>
+          </a:prstGeom>
+          <a:noFill/>
+        </p:spPr>
+        <p:txBody>
+          <a:bodyPr wrap="square">
+            <a:spAutoFit/>
+          </a:bodyPr>
+          <a:lstStyle/>
+          <a:p>
+            <a:pPr algn="ctr"/>
+            <a:r>
+              <a:rPr sz="2200" b="1">
+                <a:solidFill>
+                  <a:srgbClr val="2563EB"/>
+                </a:solidFill>
+                <a:latin typeface="PingFang SC"/>
+              </a:rPr>
+              <a:t>15</a:t>
+            </a:r>
+          </a:p>
+        </p:txBody>
+      </p:sp>
+      <p:sp>
+        <p:nvSpPr>
+          <p:cNvPr id="13" name="TextBox 12"/>
+          <p:cNvSpPr txBox="1"/>
+          <p:nvPr/>
+        </p:nvSpPr>
+        <p:spPr>
+          <a:xfrm>
+            <a:off x="3291840" y="1527048"/>
+            <a:ext cx="1874519" cy="201168"/>
+          </a:xfrm>
+          <a:prstGeom prst="rect">
+            <a:avLst/>
+          </a:prstGeom>
+          <a:noFill/>
+        </p:spPr>
+        <p:txBody>
+          <a:bodyPr wrap="square">
+            <a:spAutoFit/>
+          </a:bodyPr>
+          <a:lstStyle/>
+          <a:p>
+            <a:pPr algn="ctr"/>
+            <a:r>
+              <a:rPr sz="1000" b="0">
+                <a:solidFill>
+                  <a:srgbClr val="64748B"/>
+                </a:solidFill>
+                <a:latin typeface="PingFang SC"/>
+              </a:rPr>
+              <a:t>Issue/SOTA focused</a:t>
+            </a:r>
+          </a:p>
+        </p:txBody>
+      </p:sp>
+      <p:sp>
+        <p:nvSpPr>
+          <p:cNvPr id="14" name="Rounded Rectangle 13"/>
           <p:cNvSpPr/>
           <p:nvPr/>
         </p:nvSpPr>
         <p:spPr>
           <a:xfrm>
-            <a:off x="685800" y="2962656"/>
-            <a:ext cx="10789920" cy="457200"/>
-          </a:xfrm>
-          <a:prstGeom prst="rect">
-            <a:avLst/>
-          </a:prstGeom>
-          <a:solidFill>
-            <a:srgbClr val="EFF6FF"/>
-          </a:solidFill>
-          <a:ln>
-            <a:solidFill>
-              <a:srgbClr val="E2E8F0"/>
-            </a:solidFill>
-          </a:ln>
-        </p:spPr>
-        <p:style>
-          <a:lnRef idx="1">
-            <a:schemeClr val="accent1"/>
-          </a:lnRef>
-          <a:fillRef idx="3">
-            <a:schemeClr val="accent1"/>
-          </a:fillRef>
-          <a:effectRef idx="2">
-            <a:schemeClr val="accent1"/>
-          </a:effectRef>
-          <a:fontRef idx="minor">
-            <a:schemeClr val="lt1"/>
-          </a:fontRef>
-        </p:style>
-        <p:txBody>
-          <a:bodyPr rtlCol="0" anchor="ctr"/>
-          <a:lstStyle/>
-          <a:p>
-            <a:pPr algn="ctr"/>
-          </a:p>
-        </p:txBody>
-      </p:sp>
-      <p:sp>
-        <p:nvSpPr>
-          <p:cNvPr id="25" name="TextBox 24"/>
-          <p:cNvSpPr txBox="1"/>
-          <p:nvPr/>
-        </p:nvSpPr>
-        <p:spPr>
-          <a:xfrm>
-            <a:off x="822960" y="3063240"/>
-            <a:ext cx="2514600" cy="182880"/>
-          </a:xfrm>
-          <a:prstGeom prst="rect">
-            <a:avLst/>
-          </a:prstGeom>
-          <a:noFill/>
-        </p:spPr>
-        <p:txBody>
-          <a:bodyPr wrap="square">
-            <a:spAutoFit/>
-          </a:bodyPr>
-          <a:lstStyle/>
-          <a:p>
-            <a:r>
-              <a:rPr sz="1200" b="1">
-                <a:solidFill>
-                  <a:srgbClr val="111827"/>
-                </a:solidFill>
-                <a:latin typeface="PingFang SC"/>
-              </a:rPr>
-              <a:t>最终汇报</a:t>
-            </a:r>
-          </a:p>
-        </p:txBody>
-      </p:sp>
-      <p:sp>
-        <p:nvSpPr>
-          <p:cNvPr id="26" name="TextBox 25"/>
-          <p:cNvSpPr txBox="1"/>
-          <p:nvPr/>
-        </p:nvSpPr>
-        <p:spPr>
-          <a:xfrm>
-            <a:off x="3520440" y="3063240"/>
-            <a:ext cx="3749039" cy="182880"/>
-          </a:xfrm>
-          <a:prstGeom prst="rect">
-            <a:avLst/>
-          </a:prstGeom>
-          <a:noFill/>
-        </p:spPr>
-        <p:txBody>
-          <a:bodyPr wrap="square">
-            <a:spAutoFit/>
-          </a:bodyPr>
-          <a:lstStyle/>
-          <a:p>
-            <a:r>
-              <a:rPr sz="1200" b="0">
-                <a:solidFill>
-                  <a:srgbClr val="111827"/>
-                </a:solidFill>
-                <a:latin typeface="PingFang SC"/>
-              </a:rPr>
-              <a:t>docx/final/*.pdf + 结题答辩.pptx</a:t>
-            </a:r>
-          </a:p>
-        </p:txBody>
-      </p:sp>
-      <p:sp>
-        <p:nvSpPr>
-          <p:cNvPr id="27" name="TextBox 26"/>
-          <p:cNvSpPr txBox="1"/>
-          <p:nvPr/>
-        </p:nvSpPr>
-        <p:spPr>
-          <a:xfrm>
-            <a:off x="7498079" y="3063240"/>
-            <a:ext cx="3657600" cy="182880"/>
-          </a:xfrm>
-          <a:prstGeom prst="rect">
-            <a:avLst/>
-          </a:prstGeom>
-          <a:noFill/>
-        </p:spPr>
-        <p:txBody>
-          <a:bodyPr wrap="square">
-            <a:spAutoFit/>
-          </a:bodyPr>
-          <a:lstStyle/>
-          <a:p>
-            <a:r>
-              <a:rPr sz="1200" b="0">
-                <a:solidFill>
-                  <a:srgbClr val="475569"/>
-                </a:solidFill>
-                <a:latin typeface="PingFang SC"/>
-              </a:rPr>
-              <a:t>可直接归档</a:t>
-            </a:r>
-          </a:p>
-        </p:txBody>
-      </p:sp>
-      <p:sp>
-        <p:nvSpPr>
-          <p:cNvPr id="28" name="Rectangle 27"/>
-          <p:cNvSpPr/>
-          <p:nvPr/>
-        </p:nvSpPr>
-        <p:spPr>
-          <a:xfrm>
-            <a:off x="685800" y="3456432"/>
-            <a:ext cx="10789920" cy="457200"/>
-          </a:xfrm>
-          <a:prstGeom prst="rect">
+            <a:off x="5532120" y="960120"/>
+            <a:ext cx="2148840" cy="960120"/>
+          </a:xfrm>
+          <a:prstGeom prst="roundRect">
             <a:avLst/>
           </a:prstGeom>
           <a:solidFill>
@@ -5906,116 +5746,84 @@
       </p:sp>
       <p:sp>
         <p:nvSpPr>
-          <p:cNvPr id="29" name="TextBox 28"/>
-          <p:cNvSpPr txBox="1"/>
-          <p:nvPr/>
-        </p:nvSpPr>
-        <p:spPr>
-          <a:xfrm>
-            <a:off x="822960" y="3557016"/>
-            <a:ext cx="2514600" cy="182880"/>
-          </a:xfrm>
-          <a:prstGeom prst="rect">
-            <a:avLst/>
-          </a:prstGeom>
-          <a:noFill/>
-        </p:spPr>
-        <p:txBody>
-          <a:bodyPr wrap="square">
-            <a:spAutoFit/>
-          </a:bodyPr>
-          <a:lstStyle/>
-          <a:p>
-            <a:r>
-              <a:rPr sz="1200" b="1">
-                <a:solidFill>
-                  <a:srgbClr val="111827"/>
-                </a:solidFill>
-                <a:latin typeface="PingFang SC"/>
-              </a:rPr>
-              <a:t>讲稿</a:t>
-            </a:r>
-          </a:p>
-        </p:txBody>
-      </p:sp>
-      <p:sp>
-        <p:nvSpPr>
-          <p:cNvPr id="30" name="TextBox 29"/>
-          <p:cNvSpPr txBox="1"/>
-          <p:nvPr/>
-        </p:nvSpPr>
-        <p:spPr>
-          <a:xfrm>
-            <a:off x="3520440" y="3557016"/>
-            <a:ext cx="3749039" cy="182880"/>
-          </a:xfrm>
-          <a:prstGeom prst="rect">
-            <a:avLst/>
-          </a:prstGeom>
-          <a:noFill/>
-        </p:spPr>
-        <p:txBody>
-          <a:bodyPr wrap="square">
-            <a:spAutoFit/>
-          </a:bodyPr>
-          <a:lstStyle/>
-          <a:p>
-            <a:r>
-              <a:rPr sz="1200" b="0">
-                <a:solidFill>
-                  <a:srgbClr val="111827"/>
-                </a:solidFill>
-                <a:latin typeface="PingFang SC"/>
-              </a:rPr>
-              <a:t>docx/final/md/21_结题答辩演讲稿.md</a:t>
-            </a:r>
-          </a:p>
-        </p:txBody>
-      </p:sp>
-      <p:sp>
-        <p:nvSpPr>
-          <p:cNvPr id="31" name="TextBox 30"/>
-          <p:cNvSpPr txBox="1"/>
-          <p:nvPr/>
-        </p:nvSpPr>
-        <p:spPr>
-          <a:xfrm>
-            <a:off x="7498079" y="3557016"/>
-            <a:ext cx="3657600" cy="182880"/>
-          </a:xfrm>
-          <a:prstGeom prst="rect">
-            <a:avLst/>
-          </a:prstGeom>
-          <a:noFill/>
-        </p:spPr>
-        <p:txBody>
-          <a:bodyPr wrap="square">
-            <a:spAutoFit/>
-          </a:bodyPr>
-          <a:lstStyle/>
-          <a:p>
-            <a:r>
-              <a:rPr sz="1200" b="0">
-                <a:solidFill>
-                  <a:srgbClr val="475569"/>
-                </a:solidFill>
-                <a:latin typeface="PingFang SC"/>
-              </a:rPr>
-              <a:t>逐页答辩稿</a:t>
-            </a:r>
-          </a:p>
-        </p:txBody>
-      </p:sp>
-      <p:sp>
-        <p:nvSpPr>
-          <p:cNvPr id="32" name="Rounded Rectangle 31"/>
+          <p:cNvPr id="15" name="TextBox 14"/>
+          <p:cNvSpPr txBox="1"/>
+          <p:nvPr/>
+        </p:nvSpPr>
+        <p:spPr>
+          <a:xfrm>
+            <a:off x="5669280" y="1124712"/>
+            <a:ext cx="1874519" cy="292608"/>
+          </a:xfrm>
+          <a:prstGeom prst="rect">
+            <a:avLst/>
+          </a:prstGeom>
+          <a:noFill/>
+        </p:spPr>
+        <p:txBody>
+          <a:bodyPr wrap="square">
+            <a:spAutoFit/>
+          </a:bodyPr>
+          <a:lstStyle/>
+          <a:p>
+            <a:pPr algn="ctr"/>
+            <a:r>
+              <a:rPr sz="2200" b="1">
+                <a:solidFill>
+                  <a:srgbClr val="F97316"/>
+                </a:solidFill>
+                <a:latin typeface="PingFang SC"/>
+              </a:rPr>
+              <a:t>18</a:t>
+            </a:r>
+          </a:p>
+        </p:txBody>
+      </p:sp>
+      <p:sp>
+        <p:nvSpPr>
+          <p:cNvPr id="16" name="TextBox 15"/>
+          <p:cNvSpPr txBox="1"/>
+          <p:nvPr/>
+        </p:nvSpPr>
+        <p:spPr>
+          <a:xfrm>
+            <a:off x="5669280" y="1527048"/>
+            <a:ext cx="1874519" cy="201168"/>
+          </a:xfrm>
+          <a:prstGeom prst="rect">
+            <a:avLst/>
+          </a:prstGeom>
+          <a:noFill/>
+        </p:spPr>
+        <p:txBody>
+          <a:bodyPr wrap="square">
+            <a:spAutoFit/>
+          </a:bodyPr>
+          <a:lstStyle/>
+          <a:p>
+            <a:pPr algn="ctr"/>
+            <a:r>
+              <a:rPr sz="1000" b="0">
+                <a:solidFill>
+                  <a:srgbClr val="64748B"/>
+                </a:solidFill>
+                <a:latin typeface="PingFang SC"/>
+              </a:rPr>
+              <a:t>xLSTM 真实训练结果行</a:t>
+            </a:r>
+          </a:p>
+        </p:txBody>
+      </p:sp>
+      <p:sp>
+        <p:nvSpPr>
+          <p:cNvPr id="17" name="Rounded Rectangle 16"/>
           <p:cNvSpPr/>
           <p:nvPr/>
         </p:nvSpPr>
         <p:spPr>
           <a:xfrm>
-            <a:off x="822960" y="4800600"/>
-            <a:ext cx="10515600" cy="713232"/>
+            <a:off x="7909560" y="960120"/>
+            <a:ext cx="2148840" cy="960120"/>
           </a:xfrm>
           <a:prstGeom prst="roundRect">
             <a:avLst/>
@@ -6053,111 +5861,173 @@
       </p:sp>
       <p:sp>
         <p:nvSpPr>
-          <p:cNvPr id="33" name="Rectangle 32"/>
-          <p:cNvSpPr/>
-          <p:nvPr/>
-        </p:nvSpPr>
-        <p:spPr>
-          <a:xfrm>
-            <a:off x="822960" y="4800600"/>
-            <a:ext cx="91440" cy="713232"/>
-          </a:xfrm>
-          <a:prstGeom prst="rect">
-            <a:avLst/>
-          </a:prstGeom>
-          <a:solidFill>
-            <a:srgbClr val="DC2626"/>
-          </a:solidFill>
-          <a:ln>
-            <a:noFill/>
-          </a:ln>
-        </p:spPr>
-        <p:style>
-          <a:lnRef idx="1">
-            <a:schemeClr val="accent1"/>
-          </a:lnRef>
-          <a:fillRef idx="3">
-            <a:schemeClr val="accent1"/>
-          </a:fillRef>
-          <a:effectRef idx="2">
-            <a:schemeClr val="accent1"/>
-          </a:effectRef>
-          <a:fontRef idx="minor">
-            <a:schemeClr val="lt1"/>
-          </a:fontRef>
-        </p:style>
-        <p:txBody>
-          <a:bodyPr rtlCol="0" anchor="ctr"/>
+          <p:cNvPr id="18" name="TextBox 17"/>
+          <p:cNvSpPr txBox="1"/>
+          <p:nvPr/>
+        </p:nvSpPr>
+        <p:spPr>
+          <a:xfrm>
+            <a:off x="8046720" y="1124712"/>
+            <a:ext cx="1874519" cy="292608"/>
+          </a:xfrm>
+          <a:prstGeom prst="rect">
+            <a:avLst/>
+          </a:prstGeom>
+          <a:noFill/>
+        </p:spPr>
+        <p:txBody>
+          <a:bodyPr wrap="square">
+            <a:spAutoFit/>
+          </a:bodyPr>
           <a:lstStyle/>
           <a:p>
             <a:pPr algn="ctr"/>
-          </a:p>
-        </p:txBody>
-      </p:sp>
-      <p:sp>
-        <p:nvSpPr>
-          <p:cNvPr id="34" name="TextBox 33"/>
-          <p:cNvSpPr txBox="1"/>
-          <p:nvPr/>
-        </p:nvSpPr>
-        <p:spPr>
-          <a:xfrm>
-            <a:off x="1024128" y="4919472"/>
-            <a:ext cx="10204704" cy="256032"/>
-          </a:xfrm>
-          <a:prstGeom prst="rect">
-            <a:avLst/>
-          </a:prstGeom>
-          <a:noFill/>
-        </p:spPr>
-        <p:txBody>
-          <a:bodyPr wrap="square">
-            <a:spAutoFit/>
-          </a:bodyPr>
-          <a:lstStyle/>
-          <a:p>
-            <a:r>
-              <a:rPr sz="1600" b="1">
-                <a:solidFill>
-                  <a:srgbClr val="DC2626"/>
-                </a:solidFill>
-                <a:latin typeface="PingFang SC"/>
-              </a:rPr>
-              <a:t>一句话总结</a:t>
-            </a:r>
-          </a:p>
-        </p:txBody>
-      </p:sp>
-      <p:sp>
-        <p:nvSpPr>
-          <p:cNvPr id="35" name="TextBox 34"/>
-          <p:cNvSpPr txBox="1"/>
-          <p:nvPr/>
-        </p:nvSpPr>
-        <p:spPr>
-          <a:xfrm>
-            <a:off x="1024128" y="5239512"/>
-            <a:ext cx="10186416" cy="201167"/>
-          </a:xfrm>
-          <a:prstGeom prst="rect">
-            <a:avLst/>
-          </a:prstGeom>
-          <a:noFill/>
-        </p:spPr>
-        <p:txBody>
-          <a:bodyPr wrap="square">
-            <a:spAutoFit/>
-          </a:bodyPr>
-          <a:lstStyle/>
-          <a:p>
-            <a:r>
-              <a:rPr sz="1400" b="0">
+            <a:r>
+              <a:rPr sz="2200" b="1">
+                <a:solidFill>
+                  <a:srgbClr val="7C3AED"/>
+                </a:solidFill>
+                <a:latin typeface="PingFang SC"/>
+              </a:rPr>
+              <a:t>50</a:t>
+            </a:r>
+          </a:p>
+        </p:txBody>
+      </p:sp>
+      <p:sp>
+        <p:nvSpPr>
+          <p:cNvPr id="19" name="TextBox 18"/>
+          <p:cNvSpPr txBox="1"/>
+          <p:nvPr/>
+        </p:nvSpPr>
+        <p:spPr>
+          <a:xfrm>
+            <a:off x="8046720" y="1527048"/>
+            <a:ext cx="1874519" cy="201168"/>
+          </a:xfrm>
+          <a:prstGeom prst="rect">
+            <a:avLst/>
+          </a:prstGeom>
+          <a:noFill/>
+        </p:spPr>
+        <p:txBody>
+          <a:bodyPr wrap="square">
+            <a:spAutoFit/>
+          </a:bodyPr>
+          <a:lstStyle/>
+          <a:p>
+            <a:pPr algn="ctr"/>
+            <a:r>
+              <a:rPr sz="1000" b="0">
+                <a:solidFill>
+                  <a:srgbClr val="64748B"/>
+                </a:solidFill>
+                <a:latin typeface="PingFang SC"/>
+              </a:rPr>
+              <a:t>正式训练 epoch</a:t>
+            </a:r>
+          </a:p>
+        </p:txBody>
+      </p:sp>
+      <p:sp>
+        <p:nvSpPr>
+          <p:cNvPr id="20" name="TextBox 19"/>
+          <p:cNvSpPr txBox="1"/>
+          <p:nvPr/>
+        </p:nvSpPr>
+        <p:spPr>
+          <a:xfrm>
+            <a:off x="914400" y="2651760"/>
+            <a:ext cx="10058400" cy="5212080"/>
+          </a:xfrm>
+          <a:prstGeom prst="rect">
+            <a:avLst/>
+          </a:prstGeom>
+          <a:noFill/>
+        </p:spPr>
+        <p:txBody>
+          <a:bodyPr wrap="square" lIns="0">
+            <a:spAutoFit/>
+          </a:bodyPr>
+          <a:lstStyle/>
+          <a:p>
+            <a:pPr>
+              <a:spcAft>
+                <a:spcPts val="800"/>
+              </a:spcAft>
+              <a:defRPr sz="1600">
                 <a:solidFill>
                   <a:srgbClr val="111827"/>
                 </a:solidFill>
                 <a:latin typeface="PingFang SC"/>
-              </a:rPr>
-              <a:t>项目完成了“真实数据接入 -&gt; RUL 建模 -&gt; 论文复现 -&gt; 自动化测试 -&gt; 课程交付”的完整工程闭环。</a:t>
+              </a:defRPr>
+            </a:pPr>
+            <a:r>
+              <a:t>notebook 测试直接执行 examples/*.ipynb，而非只检查文件存在。</a:t>
+            </a:r>
+          </a:p>
+          <a:p>
+            <a:pPr>
+              <a:spcAft>
+                <a:spcPts val="800"/>
+              </a:spcAft>
+              <a:defRPr sz="1600">
+                <a:solidFill>
+                  <a:srgbClr val="111827"/>
+                </a:solidFill>
+                <a:latin typeface="PingFang SC"/>
+              </a:defRPr>
+            </a:pPr>
+            <a:r>
+              <a:t>新增 final materials alignment 测试，防止 PPT、web PPT 和讲稿回退到旧口径。</a:t>
+            </a:r>
+          </a:p>
+          <a:p>
+            <a:pPr>
+              <a:spcAft>
+                <a:spcPts val="800"/>
+              </a:spcAft>
+              <a:defRPr sz="1600">
+                <a:solidFill>
+                  <a:srgbClr val="111827"/>
+                </a:solidFill>
+                <a:latin typeface="PingFang SC"/>
+              </a:defRPr>
+            </a:pPr>
+            <a:r>
+              <a:t>真实训练输出 history.csv、metrics.json、predictions.csv、comparison_metrics.csv。</a:t>
+            </a:r>
+          </a:p>
+          <a:p>
+            <a:pPr>
+              <a:spcAft>
+                <a:spcPts val="800"/>
+              </a:spcAft>
+              <a:defRPr sz="1600">
+                <a:solidFill>
+                  <a:srgbClr val="111827"/>
+                </a:solidFill>
+                <a:latin typeface="PingFang SC"/>
+              </a:defRPr>
+            </a:pPr>
+            <a:r>
+              <a:t>tmp/、outputs/、真实数据和模型产物不提交；文档只记录命令和指标摘要。</a:t>
+            </a:r>
+          </a:p>
+          <a:p>
+            <a:pPr>
+              <a:spcAft>
+                <a:spcPts val="800"/>
+              </a:spcAft>
+              <a:defRPr sz="1600">
+                <a:solidFill>
+                  <a:srgbClr val="111827"/>
+                </a:solidFill>
+                <a:latin typeface="PingFang SC"/>
+              </a:defRPr>
+            </a:pPr>
+            <a:r>
+              <a:t>四轮提交保存阶段成果，远端 main 已推送，便于回溯。</a:t>
             </a:r>
           </a:p>
         </p:txBody>
@@ -6260,7 +6130,7 @@
                 </a:solidFill>
                 <a:latin typeface="PingFang SC"/>
               </a:rPr>
-              <a:t>Q&amp;A 备答：追问与不足</a:t>
+              <a:t>结项交付物</a:t>
             </a:r>
           </a:p>
         </p:txBody>
@@ -6420,7 +6290,7 @@
         </p:nvSpPr>
         <p:spPr>
           <a:xfrm>
-            <a:off x="685800" y="960120"/>
+            <a:off x="685800" y="987552"/>
             <a:ext cx="10789920" cy="457200"/>
           </a:xfrm>
           <a:prstGeom prst="rect">
@@ -6465,7 +6335,7 @@
         </p:nvSpPr>
         <p:spPr>
           <a:xfrm>
-            <a:off x="822960" y="1060704"/>
+            <a:off x="822960" y="1088136"/>
             <a:ext cx="2514600" cy="182880"/>
           </a:xfrm>
           <a:prstGeom prst="rect">
@@ -6486,7 +6356,7 @@
                 </a:solidFill>
                 <a:latin typeface="PingFang SC"/>
               </a:rPr>
-              <a:t>任务边界？</a:t>
+              <a:t>源码</a:t>
             </a:r>
           </a:p>
         </p:txBody>
@@ -6499,7 +6369,7 @@
         </p:nvSpPr>
         <p:spPr>
           <a:xfrm>
-            <a:off x="3520440" y="1060704"/>
+            <a:off x="3520440" y="1088136"/>
             <a:ext cx="3749039" cy="182880"/>
           </a:xfrm>
           <a:prstGeom prst="rect">
@@ -6520,7 +6390,7 @@
                 </a:solidFill>
                 <a:latin typeface="PingFang SC"/>
               </a:rPr>
-              <a:t>数据是 run-to-failure 退化序列</a:t>
+              <a:t>src/USTC/SSE/BearingPrediction</a:t>
             </a:r>
           </a:p>
         </p:txBody>
@@ -6533,7 +6403,7 @@
         </p:nvSpPr>
         <p:spPr>
           <a:xfrm>
-            <a:off x="7498079" y="1060704"/>
+            <a:off x="7498079" y="1088136"/>
             <a:ext cx="3657600" cy="182880"/>
           </a:xfrm>
           <a:prstGeom prst="rect">
@@ -6554,7 +6424,7 @@
                 </a:solidFill>
                 <a:latin typeface="PingFang SC"/>
               </a:rPr>
-              <a:t>主任务是 RUL 和预测性维护</a:t>
+              <a:t>数据、模型、训练、评估模块</a:t>
             </a:r>
           </a:p>
         </p:txBody>
@@ -6567,7 +6437,7 @@
         </p:nvSpPr>
         <p:spPr>
           <a:xfrm>
-            <a:off x="685800" y="1453896"/>
+            <a:off x="685800" y="1481328"/>
             <a:ext cx="10789920" cy="457200"/>
           </a:xfrm>
           <a:prstGeom prst="rect">
@@ -6612,7 +6482,7 @@
         </p:nvSpPr>
         <p:spPr>
           <a:xfrm>
-            <a:off x="822960" y="1554480"/>
+            <a:off x="822960" y="1581912"/>
             <a:ext cx="2514600" cy="182880"/>
           </a:xfrm>
           <a:prstGeom prst="rect">
@@ -6633,7 +6503,7 @@
                 </a:solidFill>
                 <a:latin typeface="PingFang SC"/>
               </a:rPr>
-              <a:t>为什么与论文数值存在差异？</a:t>
+              <a:t>示例</a:t>
             </a:r>
           </a:p>
         </p:txBody>
@@ -6646,7 +6516,7 @@
         </p:nvSpPr>
         <p:spPr>
           <a:xfrm>
-            <a:off x="3520440" y="1554480"/>
+            <a:off x="3520440" y="1581912"/>
             <a:ext cx="3749039" cy="182880"/>
           </a:xfrm>
           <a:prstGeom prst="rect">
@@ -6667,7 +6537,7 @@
                 </a:solidFill>
                 <a:latin typeface="PingFang SC"/>
               </a:rPr>
-              <a:t>96 快照抽样、单次训练、本机算力约束</a:t>
+              <a:t>examples/00-07 notebooks</a:t>
             </a:r>
           </a:p>
         </p:txBody>
@@ -6680,7 +6550,7 @@
         </p:nvSpPr>
         <p:spPr>
           <a:xfrm>
-            <a:off x="7498079" y="1554480"/>
+            <a:off x="7498079" y="1581912"/>
             <a:ext cx="3657600" cy="182880"/>
           </a:xfrm>
           <a:prstGeom prst="rect">
@@ -6701,7 +6571,7 @@
                 </a:solidFill>
                 <a:latin typeface="PingFang SC"/>
               </a:rPr>
-              <a:t>验证流程，不冒充作者全量训练</a:t>
+              <a:t>全部可执行</a:t>
             </a:r>
           </a:p>
         </p:txBody>
@@ -6714,7 +6584,7 @@
         </p:nvSpPr>
         <p:spPr>
           <a:xfrm>
-            <a:off x="685800" y="1947672"/>
+            <a:off x="685800" y="1975104"/>
             <a:ext cx="10789920" cy="457200"/>
           </a:xfrm>
           <a:prstGeom prst="rect">
@@ -6759,7 +6629,7 @@
         </p:nvSpPr>
         <p:spPr>
           <a:xfrm>
-            <a:off x="822960" y="2048255"/>
+            <a:off x="822960" y="2075688"/>
             <a:ext cx="2514600" cy="182880"/>
           </a:xfrm>
           <a:prstGeom prst="rect">
@@ -6780,7 +6650,7 @@
                 </a:solidFill>
                 <a:latin typeface="PingFang SC"/>
               </a:rPr>
-              <a:t>如何避免数据泄漏？</a:t>
+              <a:t>复现文档</a:t>
             </a:r>
           </a:p>
         </p:txBody>
@@ -6793,7 +6663,7 @@
         </p:nvSpPr>
         <p:spPr>
           <a:xfrm>
-            <a:off x="3520440" y="2048255"/>
+            <a:off x="3520440" y="2075688"/>
             <a:ext cx="3749039" cy="182880"/>
           </a:xfrm>
           <a:prstGeom prst="rect">
@@ -6814,7 +6684,7 @@
                 </a:solidFill>
                 <a:latin typeface="PingFang SC"/>
               </a:rPr>
-              <a:t>按时间或轴承划分，notebook 不随机混相邻窗口</a:t>
+              <a:t>docs/PAPER_REPRODUCTION.md</a:t>
             </a:r>
           </a:p>
         </p:txBody>
@@ -6827,7 +6697,7 @@
         </p:nvSpPr>
         <p:spPr>
           <a:xfrm>
-            <a:off x="7498079" y="2048255"/>
+            <a:off x="7498079" y="2075688"/>
             <a:ext cx="3657600" cy="182880"/>
           </a:xfrm>
           <a:prstGeom prst="rect">
@@ -6848,7 +6718,7 @@
                 </a:solidFill>
                 <a:latin typeface="PingFang SC"/>
               </a:rPr>
-              <a:t>真实复现按论文工况划分</a:t>
+              <a:t>两篇论文、命令、指标、边界</a:t>
             </a:r>
           </a:p>
         </p:txBody>
@@ -6861,7 +6731,7 @@
         </p:nvSpPr>
         <p:spPr>
           <a:xfrm>
-            <a:off x="685800" y="2441448"/>
+            <a:off x="685800" y="2468880"/>
             <a:ext cx="10789920" cy="457200"/>
           </a:xfrm>
           <a:prstGeom prst="rect">
@@ -6906,7 +6776,7 @@
         </p:nvSpPr>
         <p:spPr>
           <a:xfrm>
-            <a:off x="822960" y="2542032"/>
+            <a:off x="822960" y="2569464"/>
             <a:ext cx="2514600" cy="182880"/>
           </a:xfrm>
           <a:prstGeom prst="rect">
@@ -6927,7 +6797,7 @@
                 </a:solidFill>
                 <a:latin typeface="PingFang SC"/>
               </a:rPr>
-              <a:t>xLSTM 是否完全复刻？</a:t>
+              <a:t>课程文档</a:t>
             </a:r>
           </a:p>
         </p:txBody>
@@ -6940,7 +6810,7 @@
         </p:nvSpPr>
         <p:spPr>
           <a:xfrm>
-            <a:off x="3520440" y="2542032"/>
+            <a:off x="3520440" y="2569464"/>
             <a:ext cx="3749039" cy="182880"/>
           </a:xfrm>
           <a:prstGeom prst="rect">
@@ -6961,7 +6831,7 @@
                 </a:solidFill>
                 <a:latin typeface="PingFang SC"/>
               </a:rPr>
-              <a:t>论文无源码，本项目做结构复现</a:t>
+              <a:t>proposal / mid-term / final</a:t>
             </a:r>
           </a:p>
         </p:txBody>
@@ -6974,7 +6844,7 @@
         </p:nvSpPr>
         <p:spPr>
           <a:xfrm>
-            <a:off x="7498079" y="2542032"/>
+            <a:off x="7498079" y="2569464"/>
             <a:ext cx="3657600" cy="182880"/>
           </a:xfrm>
           <a:prstGeom prst="rect">
@@ -6995,7 +6865,7 @@
                 </a:solidFill>
                 <a:latin typeface="PingFang SC"/>
               </a:rPr>
-              <a:t>已在文档说明复现边界</a:t>
+              <a:t>开题、中期、结题全套材料</a:t>
             </a:r>
           </a:p>
         </p:txBody>
@@ -7008,7 +6878,7 @@
         </p:nvSpPr>
         <p:spPr>
           <a:xfrm>
-            <a:off x="685800" y="2935224"/>
+            <a:off x="685800" y="2962656"/>
             <a:ext cx="10789920" cy="457200"/>
           </a:xfrm>
           <a:prstGeom prst="rect">
@@ -7053,7 +6923,7 @@
         </p:nvSpPr>
         <p:spPr>
           <a:xfrm>
-            <a:off x="822960" y="3035808"/>
+            <a:off x="822960" y="3063240"/>
             <a:ext cx="2514600" cy="182880"/>
           </a:xfrm>
           <a:prstGeom prst="rect">
@@ -7074,7 +6944,7 @@
                 </a:solidFill>
                 <a:latin typeface="PingFang SC"/>
               </a:rPr>
-              <a:t>工程价值是什么？</a:t>
+              <a:t>最终汇报</a:t>
             </a:r>
           </a:p>
         </p:txBody>
@@ -7087,7 +6957,7 @@
         </p:nvSpPr>
         <p:spPr>
           <a:xfrm>
-            <a:off x="3520440" y="3035808"/>
+            <a:off x="3520440" y="3063240"/>
             <a:ext cx="3749039" cy="182880"/>
           </a:xfrm>
           <a:prstGeom prst="rect">
@@ -7108,7 +6978,7 @@
                 </a:solidFill>
                 <a:latin typeface="PingFang SC"/>
               </a:rPr>
-              <a:t>统一数据抽象、训练接口、实验记录、测试文档</a:t>
+              <a:t>docx/final/*.pdf + 结题答辩.pptx</a:t>
             </a:r>
           </a:p>
         </p:txBody>
@@ -7121,7 +6991,7 @@
         </p:nvSpPr>
         <p:spPr>
           <a:xfrm>
-            <a:off x="7498079" y="3035808"/>
+            <a:off x="7498079" y="3063240"/>
             <a:ext cx="3657600" cy="182880"/>
           </a:xfrm>
           <a:prstGeom prst="rect">
@@ -7142,7 +7012,7 @@
                 </a:solidFill>
                 <a:latin typeface="PingFang SC"/>
               </a:rPr>
-              <a:t>可扩展而非一次性脚本</a:t>
+              <a:t>可直接归档</a:t>
             </a:r>
           </a:p>
         </p:txBody>
@@ -7155,7 +7025,7 @@
         </p:nvSpPr>
         <p:spPr>
           <a:xfrm>
-            <a:off x="685800" y="3429000"/>
+            <a:off x="685800" y="3456432"/>
             <a:ext cx="10789920" cy="457200"/>
           </a:xfrm>
           <a:prstGeom prst="rect">
@@ -7200,7 +7070,7 @@
         </p:nvSpPr>
         <p:spPr>
           <a:xfrm>
-            <a:off x="822960" y="3529584"/>
+            <a:off x="822960" y="3557016"/>
             <a:ext cx="2514600" cy="182880"/>
           </a:xfrm>
           <a:prstGeom prst="rect">
@@ -7221,7 +7091,7 @@
                 </a:solidFill>
                 <a:latin typeface="PingFang SC"/>
               </a:rPr>
-              <a:t>不足与改进？</a:t>
+              <a:t>讲稿</a:t>
             </a:r>
           </a:p>
         </p:txBody>
@@ -7234,7 +7104,7 @@
         </p:nvSpPr>
         <p:spPr>
           <a:xfrm>
-            <a:off x="3520440" y="3529584"/>
+            <a:off x="3520440" y="3557016"/>
             <a:ext cx="3749039" cy="182880"/>
           </a:xfrm>
           <a:prstGeom prst="rect">
@@ -7255,7 +7125,7 @@
                 </a:solidFill>
                 <a:latin typeface="PingFang SC"/>
               </a:rPr>
-              <a:t>96 快照抽样，未做多随机种子统计</a:t>
+              <a:t>docx/final/md/21_结题答辩演讲稿.md</a:t>
             </a:r>
           </a:p>
         </p:txBody>
@@ -7268,7 +7138,7 @@
         </p:nvSpPr>
         <p:spPr>
           <a:xfrm>
-            <a:off x="7498079" y="3529584"/>
+            <a:off x="7498079" y="3557016"/>
             <a:ext cx="3657600" cy="182880"/>
           </a:xfrm>
           <a:prstGeom prst="rect">
@@ -7289,7 +7159,163 @@
                 </a:solidFill>
                 <a:latin typeface="PingFang SC"/>
               </a:rPr>
-              <a:t>后续做全量训练和更强泛化</a:t>
+              <a:t>逐页答辩稿</a:t>
+            </a:r>
+          </a:p>
+        </p:txBody>
+      </p:sp>
+      <p:sp>
+        <p:nvSpPr>
+          <p:cNvPr id="32" name="Rounded Rectangle 31"/>
+          <p:cNvSpPr/>
+          <p:nvPr/>
+        </p:nvSpPr>
+        <p:spPr>
+          <a:xfrm>
+            <a:off x="822960" y="4800600"/>
+            <a:ext cx="10515600" cy="713232"/>
+          </a:xfrm>
+          <a:prstGeom prst="roundRect">
+            <a:avLst/>
+          </a:prstGeom>
+          <a:solidFill>
+            <a:srgbClr val="FFFFFF"/>
+          </a:solidFill>
+          <a:ln>
+            <a:solidFill>
+              <a:srgbClr val="E2E8F0"/>
+            </a:solidFill>
+          </a:ln>
+        </p:spPr>
+        <p:style>
+          <a:lnRef idx="1">
+            <a:schemeClr val="accent1"/>
+          </a:lnRef>
+          <a:fillRef idx="3">
+            <a:schemeClr val="accent1"/>
+          </a:fillRef>
+          <a:effectRef idx="2">
+            <a:schemeClr val="accent1"/>
+          </a:effectRef>
+          <a:fontRef idx="minor">
+            <a:schemeClr val="lt1"/>
+          </a:fontRef>
+        </p:style>
+        <p:txBody>
+          <a:bodyPr rtlCol="0" anchor="ctr"/>
+          <a:lstStyle/>
+          <a:p>
+            <a:pPr algn="ctr"/>
+          </a:p>
+        </p:txBody>
+      </p:sp>
+      <p:sp>
+        <p:nvSpPr>
+          <p:cNvPr id="33" name="Rectangle 32"/>
+          <p:cNvSpPr/>
+          <p:nvPr/>
+        </p:nvSpPr>
+        <p:spPr>
+          <a:xfrm>
+            <a:off x="822960" y="4800600"/>
+            <a:ext cx="91440" cy="713232"/>
+          </a:xfrm>
+          <a:prstGeom prst="rect">
+            <a:avLst/>
+          </a:prstGeom>
+          <a:solidFill>
+            <a:srgbClr val="DC2626"/>
+          </a:solidFill>
+          <a:ln>
+            <a:noFill/>
+          </a:ln>
+        </p:spPr>
+        <p:style>
+          <a:lnRef idx="1">
+            <a:schemeClr val="accent1"/>
+          </a:lnRef>
+          <a:fillRef idx="3">
+            <a:schemeClr val="accent1"/>
+          </a:fillRef>
+          <a:effectRef idx="2">
+            <a:schemeClr val="accent1"/>
+          </a:effectRef>
+          <a:fontRef idx="minor">
+            <a:schemeClr val="lt1"/>
+          </a:fontRef>
+        </p:style>
+        <p:txBody>
+          <a:bodyPr rtlCol="0" anchor="ctr"/>
+          <a:lstStyle/>
+          <a:p>
+            <a:pPr algn="ctr"/>
+          </a:p>
+        </p:txBody>
+      </p:sp>
+      <p:sp>
+        <p:nvSpPr>
+          <p:cNvPr id="34" name="TextBox 33"/>
+          <p:cNvSpPr txBox="1"/>
+          <p:nvPr/>
+        </p:nvSpPr>
+        <p:spPr>
+          <a:xfrm>
+            <a:off x="1024128" y="4919472"/>
+            <a:ext cx="10204704" cy="256032"/>
+          </a:xfrm>
+          <a:prstGeom prst="rect">
+            <a:avLst/>
+          </a:prstGeom>
+          <a:noFill/>
+        </p:spPr>
+        <p:txBody>
+          <a:bodyPr wrap="square">
+            <a:spAutoFit/>
+          </a:bodyPr>
+          <a:lstStyle/>
+          <a:p>
+            <a:r>
+              <a:rPr sz="1600" b="1">
+                <a:solidFill>
+                  <a:srgbClr val="DC2626"/>
+                </a:solidFill>
+                <a:latin typeface="PingFang SC"/>
+              </a:rPr>
+              <a:t>一句话总结</a:t>
+            </a:r>
+          </a:p>
+        </p:txBody>
+      </p:sp>
+      <p:sp>
+        <p:nvSpPr>
+          <p:cNvPr id="35" name="TextBox 34"/>
+          <p:cNvSpPr txBox="1"/>
+          <p:nvPr/>
+        </p:nvSpPr>
+        <p:spPr>
+          <a:xfrm>
+            <a:off x="1024128" y="5239512"/>
+            <a:ext cx="10186416" cy="201167"/>
+          </a:xfrm>
+          <a:prstGeom prst="rect">
+            <a:avLst/>
+          </a:prstGeom>
+          <a:noFill/>
+        </p:spPr>
+        <p:txBody>
+          <a:bodyPr wrap="square">
+            <a:spAutoFit/>
+          </a:bodyPr>
+          <a:lstStyle/>
+          <a:p>
+            <a:r>
+              <a:rPr sz="1400" b="0">
+                <a:solidFill>
+                  <a:srgbClr val="111827"/>
+                </a:solidFill>
+                <a:latin typeface="PingFang SC"/>
+              </a:rPr>
+              <a:t>项目完成了“真实数据接入 -&gt; RUL 建模 -&gt; 论文复现 -&gt; 自动化测试 -&gt; 课程交付”的完整工程闭环。</a:t>
             </a:r>
           </a:p>
         </p:txBody>
@@ -7303,6 +7329,1285 @@
 </file>
 
 <file path=ppt/slides/slide14.xml><?xml version="1.0" encoding="utf-8"?>
+<p:sld xmlns:a="http://schemas.openxmlformats.org/drawingml/2006/main" xmlns:p="http://schemas.openxmlformats.org/presentationml/2006/main" xmlns:r="http://schemas.openxmlformats.org/officeDocument/2006/relationships">
+  <p:cSld>
+    <p:bg>
+      <p:bgPr>
+        <a:solidFill>
+          <a:srgbClr val="F8FAFC"/>
+        </a:solidFill>
+        <a:effectLst/>
+      </p:bgPr>
+    </p:bg>
+    <p:spTree>
+      <p:nvGrpSpPr>
+        <p:cNvPr id="1" name=""/>
+        <p:cNvGrpSpPr/>
+        <p:nvPr/>
+      </p:nvGrpSpPr>
+      <p:grpSpPr/>
+      <p:sp>
+        <p:nvSpPr>
+          <p:cNvPr id="2" name="Rectangle 1"/>
+          <p:cNvSpPr/>
+          <p:nvPr/>
+        </p:nvSpPr>
+        <p:spPr>
+          <a:xfrm>
+            <a:off x="0" y="0"/>
+            <a:ext cx="12191695" cy="713232"/>
+          </a:xfrm>
+          <a:prstGeom prst="rect">
+            <a:avLst/>
+          </a:prstGeom>
+          <a:solidFill>
+            <a:srgbClr val="0F244A"/>
+          </a:solidFill>
+          <a:ln>
+            <a:noFill/>
+          </a:ln>
+        </p:spPr>
+        <p:style>
+          <a:lnRef idx="1">
+            <a:schemeClr val="accent1"/>
+          </a:lnRef>
+          <a:fillRef idx="3">
+            <a:schemeClr val="accent1"/>
+          </a:fillRef>
+          <a:effectRef idx="2">
+            <a:schemeClr val="accent1"/>
+          </a:effectRef>
+          <a:fontRef idx="minor">
+            <a:schemeClr val="lt1"/>
+          </a:fontRef>
+        </p:style>
+        <p:txBody>
+          <a:bodyPr rtlCol="0" anchor="ctr"/>
+          <a:lstStyle/>
+          <a:p>
+            <a:pPr algn="ctr"/>
+          </a:p>
+        </p:txBody>
+      </p:sp>
+      <p:sp>
+        <p:nvSpPr>
+          <p:cNvPr id="3" name="TextBox 2"/>
+          <p:cNvSpPr txBox="1"/>
+          <p:nvPr/>
+        </p:nvSpPr>
+        <p:spPr>
+          <a:xfrm>
+            <a:off x="475488" y="137160"/>
+            <a:ext cx="8046720" cy="329184"/>
+          </a:xfrm>
+          <a:prstGeom prst="rect">
+            <a:avLst/>
+          </a:prstGeom>
+          <a:noFill/>
+        </p:spPr>
+        <p:txBody>
+          <a:bodyPr wrap="square">
+            <a:spAutoFit/>
+          </a:bodyPr>
+          <a:lstStyle/>
+          <a:p>
+            <a:r>
+              <a:rPr sz="2400" b="1">
+                <a:solidFill>
+                  <a:srgbClr val="FFFFFF"/>
+                </a:solidFill>
+                <a:latin typeface="PingFang SC"/>
+              </a:rPr>
+              <a:t>Q&amp;A 备答：追问与不足</a:t>
+            </a:r>
+          </a:p>
+        </p:txBody>
+      </p:sp>
+      <p:sp>
+        <p:nvSpPr>
+          <p:cNvPr id="4" name="TextBox 3"/>
+          <p:cNvSpPr txBox="1"/>
+          <p:nvPr/>
+        </p:nvSpPr>
+        <p:spPr>
+          <a:xfrm>
+            <a:off x="7498079" y="228600"/>
+            <a:ext cx="4160520" cy="219456"/>
+          </a:xfrm>
+          <a:prstGeom prst="rect">
+            <a:avLst/>
+          </a:prstGeom>
+          <a:noFill/>
+        </p:spPr>
+        <p:txBody>
+          <a:bodyPr wrap="square">
+            <a:spAutoFit/>
+          </a:bodyPr>
+          <a:lstStyle/>
+          <a:p>
+            <a:pPr algn="r"/>
+            <a:r>
+              <a:rPr sz="1000" b="0">
+                <a:solidFill>
+                  <a:srgbClr val="E2E8F0"/>
+                </a:solidFill>
+                <a:latin typeface="PingFang SC"/>
+              </a:rPr>
+              <a:t>工业轴承设备剩余寿命预测系统的实现 | 结题答辩</a:t>
+            </a:r>
+          </a:p>
+        </p:txBody>
+      </p:sp>
+      <p:sp>
+        <p:nvSpPr>
+          <p:cNvPr id="5" name="Rectangle 4"/>
+          <p:cNvSpPr/>
+          <p:nvPr/>
+        </p:nvSpPr>
+        <p:spPr>
+          <a:xfrm>
+            <a:off x="530352" y="6473952"/>
+            <a:ext cx="11064240" cy="18288"/>
+          </a:xfrm>
+          <a:prstGeom prst="rect">
+            <a:avLst/>
+          </a:prstGeom>
+          <a:solidFill>
+            <a:srgbClr val="E2E8F0"/>
+          </a:solidFill>
+          <a:ln>
+            <a:noFill/>
+          </a:ln>
+        </p:spPr>
+        <p:style>
+          <a:lnRef idx="1">
+            <a:schemeClr val="accent1"/>
+          </a:lnRef>
+          <a:fillRef idx="3">
+            <a:schemeClr val="accent1"/>
+          </a:fillRef>
+          <a:effectRef idx="2">
+            <a:schemeClr val="accent1"/>
+          </a:effectRef>
+          <a:fontRef idx="minor">
+            <a:schemeClr val="lt1"/>
+          </a:fontRef>
+        </p:style>
+        <p:txBody>
+          <a:bodyPr rtlCol="0" anchor="ctr"/>
+          <a:lstStyle/>
+          <a:p>
+            <a:pPr algn="ctr"/>
+          </a:p>
+        </p:txBody>
+      </p:sp>
+      <p:sp>
+        <p:nvSpPr>
+          <p:cNvPr id="6" name="TextBox 5"/>
+          <p:cNvSpPr txBox="1"/>
+          <p:nvPr/>
+        </p:nvSpPr>
+        <p:spPr>
+          <a:xfrm>
+            <a:off x="566928" y="6519672"/>
+            <a:ext cx="8961120" cy="164592"/>
+          </a:xfrm>
+          <a:prstGeom prst="rect">
+            <a:avLst/>
+          </a:prstGeom>
+          <a:noFill/>
+        </p:spPr>
+        <p:txBody>
+          <a:bodyPr wrap="square">
+            <a:spAutoFit/>
+          </a:bodyPr>
+          <a:lstStyle/>
+          <a:p>
+            <a:r>
+              <a:rPr sz="900" b="0">
+                <a:solidFill>
+                  <a:srgbClr val="64748B"/>
+                </a:solidFill>
+                <a:latin typeface="PingFang SC"/>
+              </a:rPr>
+              <a:t>中国科学技术大学 软件学院 | 软件工程课程结题答辩</a:t>
+            </a:r>
+          </a:p>
+        </p:txBody>
+      </p:sp>
+      <p:sp>
+        <p:nvSpPr>
+          <p:cNvPr id="7" name="TextBox 6"/>
+          <p:cNvSpPr txBox="1"/>
+          <p:nvPr/>
+        </p:nvSpPr>
+        <p:spPr>
+          <a:xfrm>
+            <a:off x="10927080" y="6519672"/>
+            <a:ext cx="548640" cy="164592"/>
+          </a:xfrm>
+          <a:prstGeom prst="rect">
+            <a:avLst/>
+          </a:prstGeom>
+          <a:noFill/>
+        </p:spPr>
+        <p:txBody>
+          <a:bodyPr wrap="square">
+            <a:spAutoFit/>
+          </a:bodyPr>
+          <a:lstStyle/>
+          <a:p>
+            <a:pPr algn="r"/>
+            <a:r>
+              <a:rPr sz="900" b="0">
+                <a:solidFill>
+                  <a:srgbClr val="64748B"/>
+                </a:solidFill>
+                <a:latin typeface="PingFang SC"/>
+              </a:rPr>
+              <a:t>14</a:t>
+            </a:r>
+          </a:p>
+        </p:txBody>
+      </p:sp>
+      <p:sp>
+        <p:nvSpPr>
+          <p:cNvPr id="8" name="Rectangle 7"/>
+          <p:cNvSpPr/>
+          <p:nvPr/>
+        </p:nvSpPr>
+        <p:spPr>
+          <a:xfrm>
+            <a:off x="685800" y="960120"/>
+            <a:ext cx="10789920" cy="530352"/>
+          </a:xfrm>
+          <a:prstGeom prst="rect">
+            <a:avLst/>
+          </a:prstGeom>
+          <a:solidFill>
+            <a:srgbClr val="EFF6FF"/>
+          </a:solidFill>
+          <a:ln>
+            <a:solidFill>
+              <a:srgbClr val="E2E8F0"/>
+            </a:solidFill>
+          </a:ln>
+        </p:spPr>
+        <p:style>
+          <a:lnRef idx="1">
+            <a:schemeClr val="accent1"/>
+          </a:lnRef>
+          <a:fillRef idx="3">
+            <a:schemeClr val="accent1"/>
+          </a:fillRef>
+          <a:effectRef idx="2">
+            <a:schemeClr val="accent1"/>
+          </a:effectRef>
+          <a:fontRef idx="minor">
+            <a:schemeClr val="lt1"/>
+          </a:fontRef>
+        </p:style>
+        <p:txBody>
+          <a:bodyPr rtlCol="0" anchor="ctr"/>
+          <a:lstStyle/>
+          <a:p>
+            <a:pPr algn="ctr"/>
+          </a:p>
+        </p:txBody>
+      </p:sp>
+      <p:sp>
+        <p:nvSpPr>
+          <p:cNvPr id="9" name="TextBox 8"/>
+          <p:cNvSpPr txBox="1"/>
+          <p:nvPr/>
+        </p:nvSpPr>
+        <p:spPr>
+          <a:xfrm>
+            <a:off x="822960" y="1060704"/>
+            <a:ext cx="2514600" cy="182880"/>
+          </a:xfrm>
+          <a:prstGeom prst="rect">
+            <a:avLst/>
+          </a:prstGeom>
+          <a:noFill/>
+        </p:spPr>
+        <p:txBody>
+          <a:bodyPr wrap="square">
+            <a:spAutoFit/>
+          </a:bodyPr>
+          <a:lstStyle/>
+          <a:p>
+            <a:r>
+              <a:rPr sz="1200" b="1">
+                <a:solidFill>
+                  <a:srgbClr val="111827"/>
+                </a:solidFill>
+                <a:latin typeface="PingFang SC"/>
+              </a:rPr>
+              <a:t>任务边界？</a:t>
+            </a:r>
+          </a:p>
+        </p:txBody>
+      </p:sp>
+      <p:sp>
+        <p:nvSpPr>
+          <p:cNvPr id="10" name="TextBox 9"/>
+          <p:cNvSpPr txBox="1"/>
+          <p:nvPr/>
+        </p:nvSpPr>
+        <p:spPr>
+          <a:xfrm>
+            <a:off x="3520440" y="1060704"/>
+            <a:ext cx="3749039" cy="182880"/>
+          </a:xfrm>
+          <a:prstGeom prst="rect">
+            <a:avLst/>
+          </a:prstGeom>
+          <a:noFill/>
+        </p:spPr>
+        <p:txBody>
+          <a:bodyPr wrap="square">
+            <a:spAutoFit/>
+          </a:bodyPr>
+          <a:lstStyle/>
+          <a:p>
+            <a:r>
+              <a:rPr sz="1200" b="0">
+                <a:solidFill>
+                  <a:srgbClr val="111827"/>
+                </a:solidFill>
+                <a:latin typeface="PingFang SC"/>
+              </a:rPr>
+              <a:t>数据是 run-to-failure 退化序列</a:t>
+            </a:r>
+          </a:p>
+        </p:txBody>
+      </p:sp>
+      <p:sp>
+        <p:nvSpPr>
+          <p:cNvPr id="11" name="TextBox 10"/>
+          <p:cNvSpPr txBox="1"/>
+          <p:nvPr/>
+        </p:nvSpPr>
+        <p:spPr>
+          <a:xfrm>
+            <a:off x="7498079" y="1060704"/>
+            <a:ext cx="3657600" cy="182880"/>
+          </a:xfrm>
+          <a:prstGeom prst="rect">
+            <a:avLst/>
+          </a:prstGeom>
+          <a:noFill/>
+        </p:spPr>
+        <p:txBody>
+          <a:bodyPr wrap="square">
+            <a:spAutoFit/>
+          </a:bodyPr>
+          <a:lstStyle/>
+          <a:p>
+            <a:r>
+              <a:rPr sz="1200" b="0">
+                <a:solidFill>
+                  <a:srgbClr val="475569"/>
+                </a:solidFill>
+                <a:latin typeface="PingFang SC"/>
+              </a:rPr>
+              <a:t>主任务是 RUL 和预测性维护</a:t>
+            </a:r>
+          </a:p>
+        </p:txBody>
+      </p:sp>
+      <p:sp>
+        <p:nvSpPr>
+          <p:cNvPr id="12" name="Rectangle 11"/>
+          <p:cNvSpPr/>
+          <p:nvPr/>
+        </p:nvSpPr>
+        <p:spPr>
+          <a:xfrm>
+            <a:off x="685800" y="1527048"/>
+            <a:ext cx="10789920" cy="530352"/>
+          </a:xfrm>
+          <a:prstGeom prst="rect">
+            <a:avLst/>
+          </a:prstGeom>
+          <a:solidFill>
+            <a:srgbClr val="FFFFFF"/>
+          </a:solidFill>
+          <a:ln>
+            <a:solidFill>
+              <a:srgbClr val="E2E8F0"/>
+            </a:solidFill>
+          </a:ln>
+        </p:spPr>
+        <p:style>
+          <a:lnRef idx="1">
+            <a:schemeClr val="accent1"/>
+          </a:lnRef>
+          <a:fillRef idx="3">
+            <a:schemeClr val="accent1"/>
+          </a:fillRef>
+          <a:effectRef idx="2">
+            <a:schemeClr val="accent1"/>
+          </a:effectRef>
+          <a:fontRef idx="minor">
+            <a:schemeClr val="lt1"/>
+          </a:fontRef>
+        </p:style>
+        <p:txBody>
+          <a:bodyPr rtlCol="0" anchor="ctr"/>
+          <a:lstStyle/>
+          <a:p>
+            <a:pPr algn="ctr"/>
+          </a:p>
+        </p:txBody>
+      </p:sp>
+      <p:sp>
+        <p:nvSpPr>
+          <p:cNvPr id="13" name="TextBox 12"/>
+          <p:cNvSpPr txBox="1"/>
+          <p:nvPr/>
+        </p:nvSpPr>
+        <p:spPr>
+          <a:xfrm>
+            <a:off x="822960" y="1627632"/>
+            <a:ext cx="2514600" cy="182880"/>
+          </a:xfrm>
+          <a:prstGeom prst="rect">
+            <a:avLst/>
+          </a:prstGeom>
+          <a:noFill/>
+        </p:spPr>
+        <p:txBody>
+          <a:bodyPr wrap="square">
+            <a:spAutoFit/>
+          </a:bodyPr>
+          <a:lstStyle/>
+          <a:p>
+            <a:r>
+              <a:rPr sz="1200" b="1">
+                <a:solidFill>
+                  <a:srgbClr val="111827"/>
+                </a:solidFill>
+                <a:latin typeface="PingFang SC"/>
+              </a:rPr>
+              <a:t>外部 SOTA？</a:t>
+            </a:r>
+          </a:p>
+        </p:txBody>
+      </p:sp>
+      <p:sp>
+        <p:nvSpPr>
+          <p:cNvPr id="14" name="TextBox 13"/>
+          <p:cNvSpPr txBox="1"/>
+          <p:nvPr/>
+        </p:nvSpPr>
+        <p:spPr>
+          <a:xfrm>
+            <a:off x="3520440" y="1627632"/>
+            <a:ext cx="3749039" cy="182880"/>
+          </a:xfrm>
+          <a:prstGeom prst="rect">
+            <a:avLst/>
+          </a:prstGeom>
+          <a:noFill/>
+        </p:spPr>
+        <p:txBody>
+          <a:bodyPr wrap="square">
+            <a:spAutoFit/>
+          </a:bodyPr>
+          <a:lstStyle/>
+          <a:p>
+            <a:r>
+              <a:rPr sz="1200" b="0">
+                <a:solidFill>
+                  <a:srgbClr val="111827"/>
+                </a:solidFill>
+                <a:latin typeface="PingFang SC"/>
+              </a:rPr>
+              <a:t>AutoRUL/GNN/Weibull 只有 source pin 和依赖 probe</a:t>
+            </a:r>
+          </a:p>
+        </p:txBody>
+      </p:sp>
+      <p:sp>
+        <p:nvSpPr>
+          <p:cNvPr id="15" name="TextBox 14"/>
+          <p:cNvSpPr txBox="1"/>
+          <p:nvPr/>
+        </p:nvSpPr>
+        <p:spPr>
+          <a:xfrm>
+            <a:off x="7498079" y="1627632"/>
+            <a:ext cx="3657600" cy="182880"/>
+          </a:xfrm>
+          <a:prstGeom prst="rect">
+            <a:avLst/>
+          </a:prstGeom>
+          <a:noFill/>
+        </p:spPr>
+        <p:txBody>
+          <a:bodyPr wrap="square">
+            <a:spAutoFit/>
+          </a:bodyPr>
+          <a:lstStyle/>
+          <a:p>
+            <a:r>
+              <a:rPr sz="1200" b="0">
+                <a:solidFill>
+                  <a:srgbClr val="475569"/>
+                </a:solidFill>
+                <a:latin typeface="PingFang SC"/>
+              </a:rPr>
+              <a:t>尚未在本地跑出指标</a:t>
+            </a:r>
+          </a:p>
+        </p:txBody>
+      </p:sp>
+      <p:sp>
+        <p:nvSpPr>
+          <p:cNvPr id="16" name="Rectangle 15"/>
+          <p:cNvSpPr/>
+          <p:nvPr/>
+        </p:nvSpPr>
+        <p:spPr>
+          <a:xfrm>
+            <a:off x="685800" y="2093976"/>
+            <a:ext cx="10789920" cy="530352"/>
+          </a:xfrm>
+          <a:prstGeom prst="rect">
+            <a:avLst/>
+          </a:prstGeom>
+          <a:solidFill>
+            <a:srgbClr val="EFF6FF"/>
+          </a:solidFill>
+          <a:ln>
+            <a:solidFill>
+              <a:srgbClr val="E2E8F0"/>
+            </a:solidFill>
+          </a:ln>
+        </p:spPr>
+        <p:style>
+          <a:lnRef idx="1">
+            <a:schemeClr val="accent1"/>
+          </a:lnRef>
+          <a:fillRef idx="3">
+            <a:schemeClr val="accent1"/>
+          </a:fillRef>
+          <a:effectRef idx="2">
+            <a:schemeClr val="accent1"/>
+          </a:effectRef>
+          <a:fontRef idx="minor">
+            <a:schemeClr val="lt1"/>
+          </a:fontRef>
+        </p:style>
+        <p:txBody>
+          <a:bodyPr rtlCol="0" anchor="ctr"/>
+          <a:lstStyle/>
+          <a:p>
+            <a:pPr algn="ctr"/>
+          </a:p>
+        </p:txBody>
+      </p:sp>
+      <p:sp>
+        <p:nvSpPr>
+          <p:cNvPr id="17" name="TextBox 16"/>
+          <p:cNvSpPr txBox="1"/>
+          <p:nvPr/>
+        </p:nvSpPr>
+        <p:spPr>
+          <a:xfrm>
+            <a:off x="822960" y="2194560"/>
+            <a:ext cx="2514600" cy="182880"/>
+          </a:xfrm>
+          <a:prstGeom prst="rect">
+            <a:avLst/>
+          </a:prstGeom>
+          <a:noFill/>
+        </p:spPr>
+        <p:txBody>
+          <a:bodyPr wrap="square">
+            <a:spAutoFit/>
+          </a:bodyPr>
+          <a:lstStyle/>
+          <a:p>
+            <a:r>
+              <a:rPr sz="1200" b="1">
+                <a:solidFill>
+                  <a:srgbClr val="111827"/>
+                </a:solidFill>
+                <a:latin typeface="PingFang SC"/>
+              </a:rPr>
+              <a:t>tsfresh 强吗？</a:t>
+            </a:r>
+          </a:p>
+        </p:txBody>
+      </p:sp>
+      <p:sp>
+        <p:nvSpPr>
+          <p:cNvPr id="18" name="TextBox 17"/>
+          <p:cNvSpPr txBox="1"/>
+          <p:nvPr/>
+        </p:nvSpPr>
+        <p:spPr>
+          <a:xfrm>
+            <a:off x="3520440" y="2194560"/>
+            <a:ext cx="3749039" cy="182880"/>
+          </a:xfrm>
+          <a:prstGeom prst="rect">
+            <a:avLst/>
+          </a:prstGeom>
+          <a:noFill/>
+        </p:spPr>
+        <p:txBody>
+          <a:bodyPr wrap="square">
+            <a:spAutoFit/>
+          </a:bodyPr>
+          <a:lstStyle/>
+          <a:p>
+            <a:r>
+              <a:rPr sz="1200" b="0">
+                <a:solidFill>
+                  <a:srgbClr val="111827"/>
+                </a:solidFill>
+                <a:latin typeface="PingFang SC"/>
+              </a:rPr>
+              <a:t>已做 train-only baseline，但相关性整体偏弱</a:t>
+            </a:r>
+          </a:p>
+        </p:txBody>
+      </p:sp>
+      <p:sp>
+        <p:nvSpPr>
+          <p:cNvPr id="19" name="TextBox 18"/>
+          <p:cNvSpPr txBox="1"/>
+          <p:nvPr/>
+        </p:nvSpPr>
+        <p:spPr>
+          <a:xfrm>
+            <a:off x="7498079" y="2194560"/>
+            <a:ext cx="3657600" cy="182880"/>
+          </a:xfrm>
+          <a:prstGeom prst="rect">
+            <a:avLst/>
+          </a:prstGeom>
+          <a:noFill/>
+        </p:spPr>
+        <p:txBody>
+          <a:bodyPr wrap="square">
+            <a:spAutoFit/>
+          </a:bodyPr>
+          <a:lstStyle/>
+          <a:p>
+            <a:r>
+              <a:rPr sz="1200" b="0">
+                <a:solidFill>
+                  <a:srgbClr val="475569"/>
+                </a:solidFill>
+                <a:latin typeface="PingFang SC"/>
+              </a:rPr>
+              <a:t>旁证，不是核心突破</a:t>
+            </a:r>
+          </a:p>
+        </p:txBody>
+      </p:sp>
+      <p:sp>
+        <p:nvSpPr>
+          <p:cNvPr id="20" name="Rectangle 19"/>
+          <p:cNvSpPr/>
+          <p:nvPr/>
+        </p:nvSpPr>
+        <p:spPr>
+          <a:xfrm>
+            <a:off x="685800" y="2660904"/>
+            <a:ext cx="10789920" cy="530352"/>
+          </a:xfrm>
+          <a:prstGeom prst="rect">
+            <a:avLst/>
+          </a:prstGeom>
+          <a:solidFill>
+            <a:srgbClr val="FFFFFF"/>
+          </a:solidFill>
+          <a:ln>
+            <a:solidFill>
+              <a:srgbClr val="E2E8F0"/>
+            </a:solidFill>
+          </a:ln>
+        </p:spPr>
+        <p:style>
+          <a:lnRef idx="1">
+            <a:schemeClr val="accent1"/>
+          </a:lnRef>
+          <a:fillRef idx="3">
+            <a:schemeClr val="accent1"/>
+          </a:fillRef>
+          <a:effectRef idx="2">
+            <a:schemeClr val="accent1"/>
+          </a:effectRef>
+          <a:fontRef idx="minor">
+            <a:schemeClr val="lt1"/>
+          </a:fontRef>
+        </p:style>
+        <p:txBody>
+          <a:bodyPr rtlCol="0" anchor="ctr"/>
+          <a:lstStyle/>
+          <a:p>
+            <a:pPr algn="ctr"/>
+          </a:p>
+        </p:txBody>
+      </p:sp>
+      <p:sp>
+        <p:nvSpPr>
+          <p:cNvPr id="21" name="TextBox 20"/>
+          <p:cNvSpPr txBox="1"/>
+          <p:nvPr/>
+        </p:nvSpPr>
+        <p:spPr>
+          <a:xfrm>
+            <a:off x="822960" y="2761488"/>
+            <a:ext cx="2514600" cy="182880"/>
+          </a:xfrm>
+          <a:prstGeom prst="rect">
+            <a:avLst/>
+          </a:prstGeom>
+          <a:noFill/>
+        </p:spPr>
+        <p:txBody>
+          <a:bodyPr wrap="square">
+            <a:spAutoFit/>
+          </a:bodyPr>
+          <a:lstStyle/>
+          <a:p>
+            <a:r>
+              <a:rPr sz="1200" b="1">
+                <a:solidFill>
+                  <a:srgbClr val="111827"/>
+                </a:solidFill>
+                <a:latin typeface="PingFang SC"/>
+              </a:rPr>
+              <a:t>RULSurv 泛化？</a:t>
+            </a:r>
+          </a:p>
+        </p:txBody>
+      </p:sp>
+      <p:sp>
+        <p:nvSpPr>
+          <p:cNvPr id="22" name="TextBox 21"/>
+          <p:cNvSpPr txBox="1"/>
+          <p:nvPr/>
+        </p:nvSpPr>
+        <p:spPr>
+          <a:xfrm>
+            <a:off x="3520440" y="2761488"/>
+            <a:ext cx="3749039" cy="182880"/>
+          </a:xfrm>
+          <a:prstGeom prst="rect">
+            <a:avLst/>
+          </a:prstGeom>
+          <a:noFill/>
+        </p:spPr>
+        <p:txBody>
+          <a:bodyPr wrap="square">
+            <a:spAutoFit/>
+          </a:bodyPr>
+          <a:lstStyle/>
+          <a:p>
+            <a:r>
+              <a:rPr sz="1200" b="0">
+                <a:solidFill>
+                  <a:srgbClr val="111827"/>
+                </a:solidFill>
+                <a:latin typeface="PingFang SC"/>
+              </a:rPr>
+              <a:t>row-level 与 held-out 分开解释</a:t>
+            </a:r>
+          </a:p>
+        </p:txBody>
+      </p:sp>
+      <p:sp>
+        <p:nvSpPr>
+          <p:cNvPr id="23" name="TextBox 22"/>
+          <p:cNvSpPr txBox="1"/>
+          <p:nvPr/>
+        </p:nvSpPr>
+        <p:spPr>
+          <a:xfrm>
+            <a:off x="7498079" y="2761488"/>
+            <a:ext cx="3657600" cy="182880"/>
+          </a:xfrm>
+          <a:prstGeom prst="rect">
+            <a:avLst/>
+          </a:prstGeom>
+          <a:noFill/>
+        </p:spPr>
+        <p:txBody>
+          <a:bodyPr wrap="square">
+            <a:spAutoFit/>
+          </a:bodyPr>
+          <a:lstStyle/>
+          <a:p>
+            <a:r>
+              <a:rPr sz="1200" b="0">
+                <a:solidFill>
+                  <a:srgbClr val="475569"/>
+                </a:solidFill>
+                <a:latin typeface="PingFang SC"/>
+              </a:rPr>
+              <a:t>held-out 是 survival_probability=0.25 保守解码</a:t>
+            </a:r>
+          </a:p>
+        </p:txBody>
+      </p:sp>
+      <p:sp>
+        <p:nvSpPr>
+          <p:cNvPr id="24" name="Rectangle 23"/>
+          <p:cNvSpPr/>
+          <p:nvPr/>
+        </p:nvSpPr>
+        <p:spPr>
+          <a:xfrm>
+            <a:off x="685800" y="3227832"/>
+            <a:ext cx="10789920" cy="530352"/>
+          </a:xfrm>
+          <a:prstGeom prst="rect">
+            <a:avLst/>
+          </a:prstGeom>
+          <a:solidFill>
+            <a:srgbClr val="EFF6FF"/>
+          </a:solidFill>
+          <a:ln>
+            <a:solidFill>
+              <a:srgbClr val="E2E8F0"/>
+            </a:solidFill>
+          </a:ln>
+        </p:spPr>
+        <p:style>
+          <a:lnRef idx="1">
+            <a:schemeClr val="accent1"/>
+          </a:lnRef>
+          <a:fillRef idx="3">
+            <a:schemeClr val="accent1"/>
+          </a:fillRef>
+          <a:effectRef idx="2">
+            <a:schemeClr val="accent1"/>
+          </a:effectRef>
+          <a:fontRef idx="minor">
+            <a:schemeClr val="lt1"/>
+          </a:fontRef>
+        </p:style>
+        <p:txBody>
+          <a:bodyPr rtlCol="0" anchor="ctr"/>
+          <a:lstStyle/>
+          <a:p>
+            <a:pPr algn="ctr"/>
+          </a:p>
+        </p:txBody>
+      </p:sp>
+      <p:sp>
+        <p:nvSpPr>
+          <p:cNvPr id="25" name="TextBox 24"/>
+          <p:cNvSpPr txBox="1"/>
+          <p:nvPr/>
+        </p:nvSpPr>
+        <p:spPr>
+          <a:xfrm>
+            <a:off x="822960" y="3328416"/>
+            <a:ext cx="2514600" cy="182880"/>
+          </a:xfrm>
+          <a:prstGeom prst="rect">
+            <a:avLst/>
+          </a:prstGeom>
+          <a:noFill/>
+        </p:spPr>
+        <p:txBody>
+          <a:bodyPr wrap="square">
+            <a:spAutoFit/>
+          </a:bodyPr>
+          <a:lstStyle/>
+          <a:p>
+            <a:r>
+              <a:rPr sz="1200" b="1">
+                <a:solidFill>
+                  <a:srgbClr val="111827"/>
+                </a:solidFill>
+                <a:latin typeface="PingFang SC"/>
+              </a:rPr>
+              <a:t>为什么与论文数值存在差异？</a:t>
+            </a:r>
+          </a:p>
+        </p:txBody>
+      </p:sp>
+      <p:sp>
+        <p:nvSpPr>
+          <p:cNvPr id="26" name="TextBox 25"/>
+          <p:cNvSpPr txBox="1"/>
+          <p:nvPr/>
+        </p:nvSpPr>
+        <p:spPr>
+          <a:xfrm>
+            <a:off x="3520440" y="3328416"/>
+            <a:ext cx="3749039" cy="182880"/>
+          </a:xfrm>
+          <a:prstGeom prst="rect">
+            <a:avLst/>
+          </a:prstGeom>
+          <a:noFill/>
+        </p:spPr>
+        <p:txBody>
+          <a:bodyPr wrap="square">
+            <a:spAutoFit/>
+          </a:bodyPr>
+          <a:lstStyle/>
+          <a:p>
+            <a:r>
+              <a:rPr sz="1200" b="0">
+                <a:solidFill>
+                  <a:srgbClr val="111827"/>
+                </a:solidFill>
+                <a:latin typeface="PingFang SC"/>
+              </a:rPr>
+              <a:t>96 快照抽样、作者源码不可得、协议差异</a:t>
+            </a:r>
+          </a:p>
+        </p:txBody>
+      </p:sp>
+      <p:sp>
+        <p:nvSpPr>
+          <p:cNvPr id="27" name="TextBox 26"/>
+          <p:cNvSpPr txBox="1"/>
+          <p:nvPr/>
+        </p:nvSpPr>
+        <p:spPr>
+          <a:xfrm>
+            <a:off x="7498079" y="3328416"/>
+            <a:ext cx="3657600" cy="182880"/>
+          </a:xfrm>
+          <a:prstGeom prst="rect">
+            <a:avLst/>
+          </a:prstGeom>
+          <a:noFill/>
+        </p:spPr>
+        <p:txBody>
+          <a:bodyPr wrap="square">
+            <a:spAutoFit/>
+          </a:bodyPr>
+          <a:lstStyle/>
+          <a:p>
+            <a:r>
+              <a:rPr sz="1200" b="0">
+                <a:solidFill>
+                  <a:srgbClr val="475569"/>
+                </a:solidFill>
+                <a:latin typeface="PingFang SC"/>
+              </a:rPr>
+              <a:t>验证流程，不冒充作者全量训练</a:t>
+            </a:r>
+          </a:p>
+        </p:txBody>
+      </p:sp>
+      <p:sp>
+        <p:nvSpPr>
+          <p:cNvPr id="28" name="Rectangle 27"/>
+          <p:cNvSpPr/>
+          <p:nvPr/>
+        </p:nvSpPr>
+        <p:spPr>
+          <a:xfrm>
+            <a:off x="685800" y="3794760"/>
+            <a:ext cx="10789920" cy="530352"/>
+          </a:xfrm>
+          <a:prstGeom prst="rect">
+            <a:avLst/>
+          </a:prstGeom>
+          <a:solidFill>
+            <a:srgbClr val="FFFFFF"/>
+          </a:solidFill>
+          <a:ln>
+            <a:solidFill>
+              <a:srgbClr val="E2E8F0"/>
+            </a:solidFill>
+          </a:ln>
+        </p:spPr>
+        <p:style>
+          <a:lnRef idx="1">
+            <a:schemeClr val="accent1"/>
+          </a:lnRef>
+          <a:fillRef idx="3">
+            <a:schemeClr val="accent1"/>
+          </a:fillRef>
+          <a:effectRef idx="2">
+            <a:schemeClr val="accent1"/>
+          </a:effectRef>
+          <a:fontRef idx="minor">
+            <a:schemeClr val="lt1"/>
+          </a:fontRef>
+        </p:style>
+        <p:txBody>
+          <a:bodyPr rtlCol="0" anchor="ctr"/>
+          <a:lstStyle/>
+          <a:p>
+            <a:pPr algn="ctr"/>
+          </a:p>
+        </p:txBody>
+      </p:sp>
+      <p:sp>
+        <p:nvSpPr>
+          <p:cNvPr id="29" name="TextBox 28"/>
+          <p:cNvSpPr txBox="1"/>
+          <p:nvPr/>
+        </p:nvSpPr>
+        <p:spPr>
+          <a:xfrm>
+            <a:off x="822960" y="3895344"/>
+            <a:ext cx="2514600" cy="182880"/>
+          </a:xfrm>
+          <a:prstGeom prst="rect">
+            <a:avLst/>
+          </a:prstGeom>
+          <a:noFill/>
+        </p:spPr>
+        <p:txBody>
+          <a:bodyPr wrap="square">
+            <a:spAutoFit/>
+          </a:bodyPr>
+          <a:lstStyle/>
+          <a:p>
+            <a:r>
+              <a:rPr sz="1200" b="1">
+                <a:solidFill>
+                  <a:srgbClr val="111827"/>
+                </a:solidFill>
+                <a:latin typeface="PingFang SC"/>
+              </a:rPr>
+              <a:t>如何避免数据泄漏？</a:t>
+            </a:r>
+          </a:p>
+        </p:txBody>
+      </p:sp>
+      <p:sp>
+        <p:nvSpPr>
+          <p:cNvPr id="30" name="TextBox 29"/>
+          <p:cNvSpPr txBox="1"/>
+          <p:nvPr/>
+        </p:nvSpPr>
+        <p:spPr>
+          <a:xfrm>
+            <a:off x="3520440" y="3895344"/>
+            <a:ext cx="3749039" cy="182880"/>
+          </a:xfrm>
+          <a:prstGeom prst="rect">
+            <a:avLst/>
+          </a:prstGeom>
+          <a:noFill/>
+        </p:spPr>
+        <p:txBody>
+          <a:bodyPr wrap="square">
+            <a:spAutoFit/>
+          </a:bodyPr>
+          <a:lstStyle/>
+          <a:p>
+            <a:r>
+              <a:rPr sz="1200" b="0">
+                <a:solidFill>
+                  <a:srgbClr val="111827"/>
+                </a:solidFill>
+                <a:latin typeface="PingFang SC"/>
+              </a:rPr>
+              <a:t>按时间或轴承划分，notebook 不随机混相邻窗口</a:t>
+            </a:r>
+          </a:p>
+        </p:txBody>
+      </p:sp>
+      <p:sp>
+        <p:nvSpPr>
+          <p:cNvPr id="31" name="TextBox 30"/>
+          <p:cNvSpPr txBox="1"/>
+          <p:nvPr/>
+        </p:nvSpPr>
+        <p:spPr>
+          <a:xfrm>
+            <a:off x="7498079" y="3895344"/>
+            <a:ext cx="3657600" cy="182880"/>
+          </a:xfrm>
+          <a:prstGeom prst="rect">
+            <a:avLst/>
+          </a:prstGeom>
+          <a:noFill/>
+        </p:spPr>
+        <p:txBody>
+          <a:bodyPr wrap="square">
+            <a:spAutoFit/>
+          </a:bodyPr>
+          <a:lstStyle/>
+          <a:p>
+            <a:r>
+              <a:rPr sz="1200" b="0">
+                <a:solidFill>
+                  <a:srgbClr val="475569"/>
+                </a:solidFill>
+                <a:latin typeface="PingFang SC"/>
+              </a:rPr>
+              <a:t>真实复现按论文工况划分</a:t>
+            </a:r>
+          </a:p>
+        </p:txBody>
+      </p:sp>
+      <p:sp>
+        <p:nvSpPr>
+          <p:cNvPr id="32" name="Rectangle 31"/>
+          <p:cNvSpPr/>
+          <p:nvPr/>
+        </p:nvSpPr>
+        <p:spPr>
+          <a:xfrm>
+            <a:off x="685800" y="4361688"/>
+            <a:ext cx="10789920" cy="530352"/>
+          </a:xfrm>
+          <a:prstGeom prst="rect">
+            <a:avLst/>
+          </a:prstGeom>
+          <a:solidFill>
+            <a:srgbClr val="EFF6FF"/>
+          </a:solidFill>
+          <a:ln>
+            <a:solidFill>
+              <a:srgbClr val="E2E8F0"/>
+            </a:solidFill>
+          </a:ln>
+        </p:spPr>
+        <p:style>
+          <a:lnRef idx="1">
+            <a:schemeClr val="accent1"/>
+          </a:lnRef>
+          <a:fillRef idx="3">
+            <a:schemeClr val="accent1"/>
+          </a:fillRef>
+          <a:effectRef idx="2">
+            <a:schemeClr val="accent1"/>
+          </a:effectRef>
+          <a:fontRef idx="minor">
+            <a:schemeClr val="lt1"/>
+          </a:fontRef>
+        </p:style>
+        <p:txBody>
+          <a:bodyPr rtlCol="0" anchor="ctr"/>
+          <a:lstStyle/>
+          <a:p>
+            <a:pPr algn="ctr"/>
+          </a:p>
+        </p:txBody>
+      </p:sp>
+      <p:sp>
+        <p:nvSpPr>
+          <p:cNvPr id="33" name="TextBox 32"/>
+          <p:cNvSpPr txBox="1"/>
+          <p:nvPr/>
+        </p:nvSpPr>
+        <p:spPr>
+          <a:xfrm>
+            <a:off x="822960" y="4462272"/>
+            <a:ext cx="2514600" cy="182880"/>
+          </a:xfrm>
+          <a:prstGeom prst="rect">
+            <a:avLst/>
+          </a:prstGeom>
+          <a:noFill/>
+        </p:spPr>
+        <p:txBody>
+          <a:bodyPr wrap="square">
+            <a:spAutoFit/>
+          </a:bodyPr>
+          <a:lstStyle/>
+          <a:p>
+            <a:r>
+              <a:rPr sz="1200" b="1">
+                <a:solidFill>
+                  <a:srgbClr val="111827"/>
+                </a:solidFill>
+                <a:latin typeface="PingFang SC"/>
+              </a:rPr>
+              <a:t>工程价值是什么？</a:t>
+            </a:r>
+          </a:p>
+        </p:txBody>
+      </p:sp>
+      <p:sp>
+        <p:nvSpPr>
+          <p:cNvPr id="34" name="TextBox 33"/>
+          <p:cNvSpPr txBox="1"/>
+          <p:nvPr/>
+        </p:nvSpPr>
+        <p:spPr>
+          <a:xfrm>
+            <a:off x="3520440" y="4462272"/>
+            <a:ext cx="3749039" cy="182880"/>
+          </a:xfrm>
+          <a:prstGeom prst="rect">
+            <a:avLst/>
+          </a:prstGeom>
+          <a:noFill/>
+        </p:spPr>
+        <p:txBody>
+          <a:bodyPr wrap="square">
+            <a:spAutoFit/>
+          </a:bodyPr>
+          <a:lstStyle/>
+          <a:p>
+            <a:r>
+              <a:rPr sz="1200" b="0">
+                <a:solidFill>
+                  <a:srgbClr val="111827"/>
+                </a:solidFill>
+                <a:latin typeface="PingFang SC"/>
+              </a:rPr>
+              <a:t>统一数据抽象、训练接口、实验记录、测试文档</a:t>
+            </a:r>
+          </a:p>
+        </p:txBody>
+      </p:sp>
+      <p:sp>
+        <p:nvSpPr>
+          <p:cNvPr id="35" name="TextBox 34"/>
+          <p:cNvSpPr txBox="1"/>
+          <p:nvPr/>
+        </p:nvSpPr>
+        <p:spPr>
+          <a:xfrm>
+            <a:off x="7498079" y="4462272"/>
+            <a:ext cx="3657600" cy="182880"/>
+          </a:xfrm>
+          <a:prstGeom prst="rect">
+            <a:avLst/>
+          </a:prstGeom>
+          <a:noFill/>
+        </p:spPr>
+        <p:txBody>
+          <a:bodyPr wrap="square">
+            <a:spAutoFit/>
+          </a:bodyPr>
+          <a:lstStyle/>
+          <a:p>
+            <a:r>
+              <a:rPr sz="1200" b="0">
+                <a:solidFill>
+                  <a:srgbClr val="475569"/>
+                </a:solidFill>
+                <a:latin typeface="PingFang SC"/>
+              </a:rPr>
+              <a:t>可扩展而非一次性脚本</a:t>
+            </a:r>
+          </a:p>
+        </p:txBody>
+      </p:sp>
+    </p:spTree>
+  </p:cSld>
+  <p:clrMapOvr>
+    <a:masterClrMapping/>
+  </p:clrMapOvr>
+</p:sld>
+</file>
+
+<file path=ppt/slides/slide15.xml><?xml version="1.0" encoding="utf-8"?>
 <p:sld xmlns:a="http://schemas.openxmlformats.org/drawingml/2006/main" xmlns:p="http://schemas.openxmlformats.org/presentationml/2006/main" xmlns:r="http://schemas.openxmlformats.org/officeDocument/2006/relationships">
   <p:cSld>
     <p:bg>
@@ -7539,7 +8844,7 @@
                 </a:solidFill>
                 <a:latin typeface="PingFang SC"/>
               </a:rPr>
-              <a:t>我们完成的是课程项目级真实训练复现和工程闭环，不把 96 快照抽样结果包装成作者全量训练。</a:t>
+              <a:t>外部 SOTA 未重跑；tsfresh 相关性整体偏弱；RULSurv held-out 是 survival_probability=0.25 的保守解码迁移结果。</a:t>
             </a:r>
           </a:p>
         </p:txBody>
@@ -7642,7 +8947,7 @@
                 </a:solidFill>
                 <a:latin typeface="PingFang SC"/>
               </a:rPr>
-              <a:t>答辩主线</a:t>
+              <a:t>答辩主线：需求、数据、架构、特征、训练、边界</a:t>
             </a:r>
           </a:p>
         </p:txBody>
@@ -8099,7 +9404,7 @@
                 </a:solidFill>
                 <a:latin typeface="PingFang SC"/>
               </a:rPr>
-              <a:t>2</a:t>
+              <a:t>4</a:t>
             </a:r>
           </a:p>
         </p:txBody>
@@ -8134,7 +9439,7 @@
                 </a:solidFill>
                 <a:latin typeface="PingFang SC"/>
               </a:rPr>
-              <a:t>RUL 论文复现</a:t>
+              <a:t>补充实验路线</a:t>
             </a:r>
           </a:p>
         </p:txBody>
@@ -8214,7 +9519,7 @@
                 </a:solidFill>
                 <a:latin typeface="PingFang SC"/>
               </a:rPr>
-              <a:t>39</a:t>
+              <a:t>59</a:t>
             </a:r>
           </a:p>
         </p:txBody>
@@ -8304,7 +9609,7 @@
               </a:defRPr>
             </a:pPr>
             <a:r>
-              <a:t>核心价值是把真实数据、特征工程、训练评估、实验记录和课程文档做成一个可运行工程。</a:t>
+              <a:t>汇报顺序按老师认知组织：需求分析 -&gt; 数据集介绍 -&gt; 项目架构 -&gt; 特征分析 -&gt; 训练展示 -&gt; 不足边界。</a:t>
             </a:r>
           </a:p>
           <a:p>
@@ -8320,7 +9625,23 @@
               </a:defRPr>
             </a:pPr>
             <a:r>
-              <a:t>答辩重点：我理解数据的时间语义，也能解释模型输入、指标口径和复现边界。</a:t>
+              <a:t>新增证据包括 tsfresh/sktime baseline、RULSurv RSF port、strict repeated seed 和 external SOTA probe。</a:t>
+            </a:r>
+          </a:p>
+          <a:p>
+            <a:pPr>
+              <a:spcAft>
+                <a:spcPts val="800"/>
+              </a:spcAft>
+              <a:defRPr sz="1700">
+                <a:solidFill>
+                  <a:srgbClr val="111827"/>
+                </a:solidFill>
+                <a:latin typeface="PingFang SC"/>
+              </a:defRPr>
+            </a:pPr>
+            <a:r>
+              <a:t>答辩重点：讲清完成证据，也讲清 external SOTA 未重跑、tsfresh 弱相关、RULSurv 0.25 保守解码边界。</a:t>
             </a:r>
           </a:p>
         </p:txBody>
@@ -11317,7 +12638,7 @@
               </a:defRPr>
             </a:pPr>
             <a:r>
-              <a:t>频域特征补充“能量集中在哪些频率”，避免只看振幅大小。</a:t>
+              <a:t>tsfresh 已完成 train-only 筛选，但相关性整体偏弱：top correlation 约 0.200994，只作为自动特征分析旁证。</a:t>
             </a:r>
           </a:p>
         </p:txBody>

--- a/docx/final/工业轴承设备剩余寿命预测系统的实现-结题答辩.pptx
+++ b/docx/final/工业轴承设备剩余寿命预测系统的实现-结题答辩.pptx
@@ -3613,7 +3613,7 @@
                 </a:solidFill>
                 <a:latin typeface="PingFang SC"/>
               </a:rPr>
-              <a:t>tsfresh</a:t>
+              <a:t>tsfresh Minimal</a:t>
             </a:r>
           </a:p>
         </p:txBody>
@@ -3647,7 +3647,7 @@
                 </a:solidFill>
                 <a:latin typeface="PingFang SC"/>
               </a:rPr>
-              <a:t>selected features + RandomForest mean NRMSE 0.315629</a:t>
+              <a:t>selected RF mean NRMSE 0.315629</a:t>
             </a:r>
           </a:p>
         </p:txBody>
@@ -3681,7 +3681,7 @@
                 </a:solidFill>
                 <a:latin typeface="PingFang SC"/>
               </a:rPr>
-              <a:t>相关性整体偏弱，不是核心性能突破</a:t>
+              <a:t>top correlation 0.200994，相关性整体偏弱</a:t>
             </a:r>
           </a:p>
         </p:txBody>
@@ -3760,7 +3760,7 @@
                 </a:solidFill>
                 <a:latin typeface="PingFang SC"/>
               </a:rPr>
-              <a:t>sktime RocketRegressor</a:t>
+              <a:t>tsfresh Efficient</a:t>
             </a:r>
           </a:p>
         </p:txBody>
@@ -3794,7 +3794,7 @@
                 </a:solidFill>
                 <a:latin typeface="PingFang SC"/>
               </a:rPr>
-              <a:t>held-out Bearing1_3 mean NRMSE 0.263706</a:t>
+              <a:t>selected RF mean NRMSE 0.318682；manual+selected 0.319927</a:t>
             </a:r>
           </a:p>
         </p:txBody>
@@ -3828,7 +3828,7 @@
                 </a:solidFill>
                 <a:latin typeface="PingFang SC"/>
               </a:rPr>
-              <a:t>当前优于 tsfresh RF，是补充 baseline</a:t>
+              <a:t>top correlation 0.424468，但不是核心突破</a:t>
             </a:r>
           </a:p>
         </p:txBody>
@@ -3907,7 +3907,7 @@
                 </a:solidFill>
                 <a:latin typeface="PingFang SC"/>
               </a:rPr>
-              <a:t>RULSurv row-level</a:t>
+              <a:t>sktime RocketRegressor</a:t>
             </a:r>
           </a:p>
         </p:txBody>
@@ -3941,7 +3941,7 @@
                 </a:solidFill>
                 <a:latin typeface="PingFang SC"/>
               </a:rPr>
-              <a:t>25% censored CV mean true MAE 6.926416 min</a:t>
+              <a:t>held-out Bearing1_3 mean NRMSE 0.263706</a:t>
             </a:r>
           </a:p>
         </p:txBody>
@@ -3975,7 +3975,7 @@
                 </a:solidFill>
                 <a:latin typeface="PingFang SC"/>
               </a:rPr>
-              <a:t>PROTOCOL_PASS，但不是 held-out 泛化</a:t>
+              <a:t>当前优于 tsfresh RF，是补充 baseline</a:t>
             </a:r>
           </a:p>
         </p:txBody>
@@ -4054,7 +4054,7 @@
                 </a:solidFill>
                 <a:latin typeface="PingFang SC"/>
               </a:rPr>
-              <a:t>RULSurv held-out</a:t>
+              <a:t>RULSurv row-level</a:t>
             </a:r>
           </a:p>
         </p:txBody>
@@ -4088,7 +4088,7 @@
                 </a:solidFill>
                 <a:latin typeface="PingFang SC"/>
               </a:rPr>
-              <a:t>Bearing1_3 mean true MAE 14.307856 min</a:t>
+              <a:t>25% censored CV mean true MAE 6.926416 min</a:t>
             </a:r>
           </a:p>
         </p:txBody>
@@ -4122,7 +4122,7 @@
                 </a:solidFill>
                 <a:latin typeface="PingFang SC"/>
               </a:rPr>
-              <a:t>MIGRATION_PASS，survival_probability=0.25 保守解码</a:t>
+              <a:t>PROTOCOL_PASS，但不是 held-out 泛化</a:t>
             </a:r>
           </a:p>
         </p:txBody>
@@ -4201,7 +4201,7 @@
                 </a:solidFill>
                 <a:latin typeface="PingFang SC"/>
               </a:rPr>
-              <a:t>外部 SOTA</a:t>
+              <a:t>RULSurv held-out</a:t>
             </a:r>
           </a:p>
         </p:txBody>
@@ -4235,7 +4235,7 @@
                 </a:solidFill>
                 <a:latin typeface="PingFang SC"/>
               </a:rPr>
-              <a:t>AutoRUL / GNN / Weibull 完成 source pin 与依赖 probe</a:t>
+              <a:t>Bearing1_3 mean true MAE 14.307856 min</a:t>
             </a:r>
           </a:p>
         </p:txBody>
@@ -4269,23 +4269,23 @@
                 </a:solidFill>
                 <a:latin typeface="PingFang SC"/>
               </a:rPr>
-              <a:t>尚未在本地跑出指标，不能说已复现</a:t>
-            </a:r>
-          </a:p>
-        </p:txBody>
-      </p:sp>
-      <p:sp>
-        <p:nvSpPr>
-          <p:cNvPr id="28" name="Rounded Rectangle 27"/>
+              <a:t>MIGRATION_PASS，survival_probability=0.25 保守解码</a:t>
+            </a:r>
+          </a:p>
+        </p:txBody>
+      </p:sp>
+      <p:sp>
+        <p:nvSpPr>
+          <p:cNvPr id="28" name="Rectangle 27"/>
           <p:cNvSpPr/>
           <p:nvPr/>
         </p:nvSpPr>
         <p:spPr>
           <a:xfrm>
-            <a:off x="822960" y="4983480"/>
-            <a:ext cx="10515600" cy="658368"/>
-          </a:xfrm>
-          <a:prstGeom prst="roundRect">
+            <a:off x="685800" y="3904487"/>
+            <a:ext cx="10789920" cy="557784"/>
+          </a:xfrm>
+          <a:prstGeom prst="rect">
             <a:avLst/>
           </a:prstGeom>
           <a:solidFill>
@@ -4321,7 +4321,154 @@
       </p:sp>
       <p:sp>
         <p:nvSpPr>
-          <p:cNvPr id="29" name="Rectangle 28"/>
+          <p:cNvPr id="29" name="TextBox 28"/>
+          <p:cNvSpPr txBox="1"/>
+          <p:nvPr/>
+        </p:nvSpPr>
+        <p:spPr>
+          <a:xfrm>
+            <a:off x="822960" y="4005072"/>
+            <a:ext cx="2514600" cy="182880"/>
+          </a:xfrm>
+          <a:prstGeom prst="rect">
+            <a:avLst/>
+          </a:prstGeom>
+          <a:noFill/>
+        </p:spPr>
+        <p:txBody>
+          <a:bodyPr wrap="square">
+            <a:spAutoFit/>
+          </a:bodyPr>
+          <a:lstStyle/>
+          <a:p>
+            <a:r>
+              <a:rPr sz="1200" b="1">
+                <a:solidFill>
+                  <a:srgbClr val="111827"/>
+                </a:solidFill>
+                <a:latin typeface="PingFang SC"/>
+              </a:rPr>
+              <a:t>外部 SOTA</a:t>
+            </a:r>
+          </a:p>
+        </p:txBody>
+      </p:sp>
+      <p:sp>
+        <p:nvSpPr>
+          <p:cNvPr id="30" name="TextBox 29"/>
+          <p:cNvSpPr txBox="1"/>
+          <p:nvPr/>
+        </p:nvSpPr>
+        <p:spPr>
+          <a:xfrm>
+            <a:off x="3520440" y="4005072"/>
+            <a:ext cx="3749039" cy="182880"/>
+          </a:xfrm>
+          <a:prstGeom prst="rect">
+            <a:avLst/>
+          </a:prstGeom>
+          <a:noFill/>
+        </p:spPr>
+        <p:txBody>
+          <a:bodyPr wrap="square">
+            <a:spAutoFit/>
+          </a:bodyPr>
+          <a:lstStyle/>
+          <a:p>
+            <a:r>
+              <a:rPr sz="1200" b="0">
+                <a:solidFill>
+                  <a:srgbClr val="111827"/>
+                </a:solidFill>
+                <a:latin typeface="PingFang SC"/>
+              </a:rPr>
+              <a:t>AutoRUL / GNN / Weibull 完成 source pin 与依赖 probe</a:t>
+            </a:r>
+          </a:p>
+        </p:txBody>
+      </p:sp>
+      <p:sp>
+        <p:nvSpPr>
+          <p:cNvPr id="31" name="TextBox 30"/>
+          <p:cNvSpPr txBox="1"/>
+          <p:nvPr/>
+        </p:nvSpPr>
+        <p:spPr>
+          <a:xfrm>
+            <a:off x="7498079" y="4005072"/>
+            <a:ext cx="3657600" cy="182880"/>
+          </a:xfrm>
+          <a:prstGeom prst="rect">
+            <a:avLst/>
+          </a:prstGeom>
+          <a:noFill/>
+        </p:spPr>
+        <p:txBody>
+          <a:bodyPr wrap="square">
+            <a:spAutoFit/>
+          </a:bodyPr>
+          <a:lstStyle/>
+          <a:p>
+            <a:r>
+              <a:rPr sz="1200" b="0">
+                <a:solidFill>
+                  <a:srgbClr val="475569"/>
+                </a:solidFill>
+                <a:latin typeface="PingFang SC"/>
+              </a:rPr>
+              <a:t>尚未在本地跑出指标，不能说已复现</a:t>
+            </a:r>
+          </a:p>
+        </p:txBody>
+      </p:sp>
+      <p:sp>
+        <p:nvSpPr>
+          <p:cNvPr id="32" name="Rounded Rectangle 31"/>
+          <p:cNvSpPr/>
+          <p:nvPr/>
+        </p:nvSpPr>
+        <p:spPr>
+          <a:xfrm>
+            <a:off x="822960" y="4983480"/>
+            <a:ext cx="10515600" cy="658368"/>
+          </a:xfrm>
+          <a:prstGeom prst="roundRect">
+            <a:avLst/>
+          </a:prstGeom>
+          <a:solidFill>
+            <a:srgbClr val="FFFFFF"/>
+          </a:solidFill>
+          <a:ln>
+            <a:solidFill>
+              <a:srgbClr val="E2E8F0"/>
+            </a:solidFill>
+          </a:ln>
+        </p:spPr>
+        <p:style>
+          <a:lnRef idx="1">
+            <a:schemeClr val="accent1"/>
+          </a:lnRef>
+          <a:fillRef idx="3">
+            <a:schemeClr val="accent1"/>
+          </a:fillRef>
+          <a:effectRef idx="2">
+            <a:schemeClr val="accent1"/>
+          </a:effectRef>
+          <a:fontRef idx="minor">
+            <a:schemeClr val="lt1"/>
+          </a:fontRef>
+        </p:style>
+        <p:txBody>
+          <a:bodyPr rtlCol="0" anchor="ctr"/>
+          <a:lstStyle/>
+          <a:p>
+            <a:pPr algn="ctr"/>
+          </a:p>
+        </p:txBody>
+      </p:sp>
+      <p:sp>
+        <p:nvSpPr>
+          <p:cNvPr id="33" name="Rectangle 32"/>
           <p:cNvSpPr/>
           <p:nvPr/>
         </p:nvSpPr>
@@ -4364,7 +4511,7 @@
       </p:sp>
       <p:sp>
         <p:nvSpPr>
-          <p:cNvPr id="30" name="TextBox 29"/>
+          <p:cNvPr id="34" name="TextBox 33"/>
           <p:cNvSpPr txBox="1"/>
           <p:nvPr/>
         </p:nvSpPr>
@@ -4398,7 +4545,7 @@
       </p:sp>
       <p:sp>
         <p:nvSpPr>
-          <p:cNvPr id="31" name="TextBox 30"/>
+          <p:cNvPr id="35" name="TextBox 34"/>
           <p:cNvSpPr txBox="1"/>
           <p:nvPr/>
         </p:nvSpPr>
@@ -7972,7 +8119,7 @@
                 </a:solidFill>
                 <a:latin typeface="PingFang SC"/>
               </a:rPr>
-              <a:t>已做 train-only baseline，但相关性整体偏弱</a:t>
+              <a:t>Minimal/Efficient 与 manual+tsfresh 已跑</a:t>
             </a:r>
           </a:p>
         </p:txBody>
@@ -8006,7 +8153,7 @@
                 </a:solidFill>
                 <a:latin typeface="PingFang SC"/>
               </a:rPr>
-              <a:t>旁证，不是核心突破</a:t>
+              <a:t>RF 仍弱于 Rocket，不是核心突破</a:t>
             </a:r>
           </a:p>
         </p:txBody>
@@ -8844,7 +8991,7 @@
                 </a:solidFill>
                 <a:latin typeface="PingFang SC"/>
               </a:rPr>
-              <a:t>外部 SOTA 未重跑；tsfresh 相关性整体偏弱；RULSurv held-out 是 survival_probability=0.25 的保守解码迁移结果。</a:t>
+              <a:t>外部 SOTA 未重跑；tsfresh 已做 Minimal/Efficient 与 manual+tsfresh，但不是核心突破；RULSurv held-out 是 survival_probability=0.25 的保守解码迁移结果。</a:t>
             </a:r>
           </a:p>
         </p:txBody>
@@ -12638,7 +12785,7 @@
               </a:defRPr>
             </a:pPr>
             <a:r>
-              <a:t>tsfresh 已完成 train-only 筛选，但相关性整体偏弱：top correlation 约 0.200994，只作为自动特征分析旁证。</a:t>
+              <a:t>tsfresh 已完成 Minimal/Efficient train-only 筛选、held-out baseline 和 manual+tsfresh 融合验证；RF NRMSE 仍弱于 Rocket，定位为自动特征分析旁证。</a:t>
             </a:r>
           </a:p>
         </p:txBody>
